--- a/videos/machine-learning/03_ridger_regression_gradient_descent/recreated_pptx/slide_050_recreated.pptx
+++ b/videos/machine-learning/03_ridger_regression_gradient_descent/recreated_pptx/slide_050_recreated.pptx
@@ -2159,7 +2159,7 @@
       </p:sp>
       <p:pic>
         <p:nvPicPr>
-          <p:cNvPr id="33" name="Image 0" descr="/workspaces/codespaces-blank/ai_llm_slides/videos/machine-learning/03_ridger_regression_gradient_descent/recreated_pptx/build/assets/eq_050_initialW.png">    </p:cNvPr>
+          <p:cNvPr id="33" name="Image 0" descr="/home/ahmed/Projects/ai_llm_slides/videos/machine-learning/03_ridger_regression_gradient_descent/recreated_pptx/build/assets/eq_050_initialW.png">    </p:cNvPr>
           <p:cNvPicPr>
             <a:picLocks noChangeAspect="1"/>
           </p:cNvPicPr>
@@ -2314,7 +2314,7 @@
       </p:sp>
       <p:pic>
         <p:nvPicPr>
-          <p:cNvPr id="37" name="Image 1" descr="/workspaces/codespaces-blank/ai_llm_slides/videos/machine-learning/03_ridger_regression_gradient_descent/recreated_pptx/build/assets/eq_050_Z1.png">    </p:cNvPr>
+          <p:cNvPr id="37" name="Image 1" descr="/home/ahmed/Projects/ai_llm_slides/videos/machine-learning/03_ridger_regression_gradient_descent/recreated_pptx/build/assets/eq_050_Z1.png">    </p:cNvPr>
           <p:cNvPicPr>
             <a:picLocks noChangeAspect="1"/>
           </p:cNvPicPr>
@@ -2391,7 +2391,7 @@
       </p:sp>
       <p:pic>
         <p:nvPicPr>
-          <p:cNvPr id="39" name="Image 2" descr="/workspaces/codespaces-blank/ai_llm_slides/videos/machine-learning/03_ridger_regression_gradient_descent/recreated_pptx/build/assets/eq_050_Z2.png">    </p:cNvPr>
+          <p:cNvPr id="39" name="Image 2" descr="/home/ahmed/Projects/ai_llm_slides/videos/machine-learning/03_ridger_regression_gradient_descent/recreated_pptx/build/assets/eq_050_Z2.png">    </p:cNvPr>
           <p:cNvPicPr>
             <a:picLocks noChangeAspect="1"/>
           </p:cNvPicPr>
@@ -2468,7 +2468,7 @@
       </p:sp>
       <p:pic>
         <p:nvPicPr>
-          <p:cNvPr id="41" name="Image 3" descr="/workspaces/codespaces-blank/ai_llm_slides/videos/machine-learning/03_ridger_regression_gradient_descent/recreated_pptx/build/assets/eq_050_Z3.png">    </p:cNvPr>
+          <p:cNvPr id="41" name="Image 3" descr="/home/ahmed/Projects/ai_llm_slides/videos/machine-learning/03_ridger_regression_gradient_descent/recreated_pptx/build/assets/eq_050_Z3.png">    </p:cNvPr>
           <p:cNvPicPr>
             <a:picLocks noChangeAspect="1"/>
           </p:cNvPicPr>
@@ -2654,7 +2654,7 @@
       </p:sp>
       <p:pic>
         <p:nvPicPr>
-          <p:cNvPr id="44" name="Image 4" descr="/workspaces/codespaces-blank/ai_llm_slides/videos/machine-learning/03_ridger_regression_gradient_descent/recreated_pptx/build/assets/eq_050_finalW.png">    </p:cNvPr>
+          <p:cNvPr id="44" name="Image 4" descr="/home/ahmed/Projects/ai_llm_slides/videos/machine-learning/03_ridger_regression_gradient_descent/recreated_pptx/build/assets/eq_050_finalW.png">    </p:cNvPr>
           <p:cNvPicPr>
             <a:picLocks noChangeAspect="1"/>
           </p:cNvPicPr>
@@ -2668,8 +2668,8 @@
         </p:blipFill>
         <p:spPr>
           <a:xfrm>
-            <a:off x="9448800" y="876300"/>
-            <a:ext cx="848865" cy="327657"/>
+            <a:off x="9436100" y="850900"/>
+            <a:ext cx="1031745" cy="755907"/>
           </a:xfrm>
           <a:prstGeom prst="rect">
             <a:avLst/>
@@ -2748,8 +2748,8 @@
         </p:nvSpPr>
         <p:spPr>
           <a:xfrm>
-            <a:off x="990600" y="4445000"/>
-            <a:ext cx="1778000" cy="266700"/>
+            <a:off x="977900" y="4419600"/>
+            <a:ext cx="2032000" cy="292100"/>
           </a:xfrm>
           <a:prstGeom prst="rect">
             <a:avLst/>
@@ -2765,7 +2765,7 @@
               <a:buNone/>
             </a:pPr>
             <a:r>
-              <a:rPr lang="en-US" sz="1100" dirty="0">
+              <a:rPr lang="en-US" sz="2000" dirty="0">
                 <a:solidFill>
                   <a:srgbClr val="000000"/>
                 </a:solidFill>
@@ -2779,7 +2779,7 @@
               <a:buNone/>
             </a:pPr>
             <a:r>
-              <a:rPr lang="en-US" sz="1100" i="1" u="sng" dirty="0">
+              <a:rPr lang="en-US" sz="2000" i="1" u="sng" dirty="0">
                 <a:solidFill>
                   <a:srgbClr val="000000"/>
                 </a:solidFill>
@@ -2789,7 +2789,7 @@
               </a:rPr>
               <a:t>W</a:t>
             </a:r>
-            <a:endParaRPr lang="en-US" sz="1100" dirty="0"/>
+            <a:endParaRPr lang="en-US" sz="2000" dirty="0"/>
           </a:p>
         </p:txBody>
       </p:sp>
@@ -2801,8 +2801,8 @@
         </p:nvSpPr>
         <p:spPr>
           <a:xfrm>
-            <a:off x="1054100" y="4762500"/>
-            <a:ext cx="1778000" cy="241300"/>
+            <a:off x="1054100" y="4737100"/>
+            <a:ext cx="2032000" cy="279400"/>
           </a:xfrm>
           <a:prstGeom prst="rect">
             <a:avLst/>
@@ -2818,7 +2818,7 @@
               <a:buNone/>
             </a:pPr>
             <a:r>
-              <a:rPr lang="en-US" sz="1100" b="1" dirty="0">
+              <a:rPr lang="en-US" sz="2000" b="1" dirty="0">
                 <a:solidFill>
                   <a:srgbClr val="92211B"/>
                 </a:solidFill>
@@ -2832,7 +2832,7 @@
               <a:buNone/>
             </a:pPr>
             <a:r>
-              <a:rPr lang="en-US" sz="1100" dirty="0">
+              <a:rPr lang="en-US" sz="2000" dirty="0">
                 <a:solidFill>
                   <a:srgbClr val="000000"/>
                 </a:solidFill>
@@ -2842,7 +2842,7 @@
               </a:rPr>
               <a:t> Iterations</a:t>
             </a:r>
-            <a:endParaRPr lang="en-US" sz="1100" dirty="0"/>
+            <a:endParaRPr lang="en-US" sz="2000" dirty="0"/>
           </a:p>
         </p:txBody>
       </p:sp>
@@ -3823,7 +3823,7 @@
         </p:nvSpPr>
         <p:spPr>
           <a:xfrm>
-            <a:off x="5894705" y="4614647"/>
+            <a:off x="5225098" y="4614647"/>
             <a:ext cx="101600" cy="101600"/>
           </a:xfrm>
           <a:prstGeom prst="rect">
@@ -3922,7 +3922,7 @@
           <p:nvPr/>
         </p:nvSpPr>
         <p:spPr>
-          <a:xfrm>
+          <a:xfrm flipV="1">
             <a:off x="9236393" y="3050210"/>
             <a:ext cx="114300" cy="114300"/>
           </a:xfrm>
@@ -3947,11 +3947,11 @@
           <p:nvPr/>
         </p:nvSpPr>
         <p:spPr>
-          <a:xfrm>
-            <a:off x="4549140" y="5387340"/>
+          <a:xfrm flipV="1">
+            <a:off x="6557963" y="4608297"/>
             <a:ext cx="114300" cy="114300"/>
           </a:xfrm>
-          <a:prstGeom prst="ellipse">
+          <a:prstGeom prst="triangle">
             <a:avLst/>
           </a:prstGeom>
           <a:solidFill>
@@ -3967,7 +3967,32 @@
       </p:sp>
       <p:sp>
         <p:nvSpPr>
-          <p:cNvPr id="85" name="Text 78"/>
+          <p:cNvPr id="85" name="Shape 78"/>
+          <p:cNvSpPr/>
+          <p:nvPr/>
+        </p:nvSpPr>
+        <p:spPr>
+          <a:xfrm flipV="1">
+            <a:off x="4549140" y="5387340"/>
+            <a:ext cx="114300" cy="114300"/>
+          </a:xfrm>
+          <a:prstGeom prst="triangle">
+            <a:avLst/>
+          </a:prstGeom>
+          <a:solidFill>
+            <a:srgbClr val="D2000F"/>
+          </a:solidFill>
+          <a:ln w="12700">
+            <a:solidFill>
+              <a:srgbClr val="D2000F"/>
+            </a:solidFill>
+            <a:prstDash val="solid"/>
+          </a:ln>
+        </p:spPr>
+      </p:sp>
+      <p:sp>
+        <p:nvSpPr>
+          <p:cNvPr id="86" name="Text 79"/>
           <p:cNvSpPr/>
           <p:nvPr/>
         </p:nvSpPr>
@@ -4006,7 +4031,7 @@
       </p:sp>
       <p:sp>
         <p:nvSpPr>
-          <p:cNvPr id="86" name="Shape 79"/>
+          <p:cNvPr id="87" name="Shape 80"/>
           <p:cNvSpPr/>
           <p:nvPr/>
         </p:nvSpPr>
@@ -4030,7 +4055,7 @@
       </p:sp>
       <p:sp>
         <p:nvSpPr>
-          <p:cNvPr id="87" name="Shape 80"/>
+          <p:cNvPr id="88" name="Shape 81"/>
           <p:cNvSpPr/>
           <p:nvPr/>
         </p:nvSpPr>
@@ -4054,7 +4079,7 @@
       </p:sp>
       <p:sp>
         <p:nvSpPr>
-          <p:cNvPr id="88" name="Shape 81"/>
+          <p:cNvPr id="89" name="Shape 82"/>
           <p:cNvSpPr/>
           <p:nvPr/>
         </p:nvSpPr>
@@ -4079,7 +4104,7 @@
       </p:sp>
       <p:sp>
         <p:nvSpPr>
-          <p:cNvPr id="89" name="Text 82"/>
+          <p:cNvPr id="90" name="Text 83"/>
           <p:cNvSpPr/>
           <p:nvPr/>
         </p:nvSpPr>
@@ -4118,7 +4143,7 @@
       </p:sp>
       <p:sp>
         <p:nvSpPr>
-          <p:cNvPr id="90" name="Text 83"/>
+          <p:cNvPr id="91" name="Text 84"/>
           <p:cNvSpPr/>
           <p:nvPr/>
         </p:nvSpPr>
@@ -4171,7 +4196,7 @@
       </p:sp>
       <p:sp>
         <p:nvSpPr>
-          <p:cNvPr id="91" name="Text 84"/>
+          <p:cNvPr id="92" name="Text 85"/>
           <p:cNvSpPr/>
           <p:nvPr/>
         </p:nvSpPr>
@@ -4224,7 +4249,7 @@
       </p:sp>
       <p:sp>
         <p:nvSpPr>
-          <p:cNvPr id="92" name="Text 85"/>
+          <p:cNvPr id="93" name="Text 86"/>
           <p:cNvSpPr/>
           <p:nvPr/>
         </p:nvSpPr>
@@ -4277,7 +4302,7 @@
       </p:sp>
       <p:sp>
         <p:nvSpPr>
-          <p:cNvPr id="93" name="Text 86"/>
+          <p:cNvPr id="94" name="Text 87"/>
           <p:cNvSpPr/>
           <p:nvPr/>
         </p:nvSpPr>
@@ -4330,7 +4355,7 @@
       </p:sp>
       <p:sp>
         <p:nvSpPr>
-          <p:cNvPr id="94" name="Text 87"/>
+          <p:cNvPr id="95" name="Text 88"/>
           <p:cNvSpPr/>
           <p:nvPr/>
         </p:nvSpPr>
@@ -4383,7 +4408,7 @@
       </p:sp>
       <p:sp>
         <p:nvSpPr>
-          <p:cNvPr id="95" name="Text 88"/>
+          <p:cNvPr id="96" name="Text 89"/>
           <p:cNvSpPr/>
           <p:nvPr/>
         </p:nvSpPr>
@@ -4436,7 +4461,7 @@
       </p:sp>
       <p:sp>
         <p:nvSpPr>
-          <p:cNvPr id="96" name="Text 89"/>
+          <p:cNvPr id="97" name="Text 90"/>
           <p:cNvSpPr/>
           <p:nvPr/>
         </p:nvSpPr>
@@ -4475,7 +4500,7 @@
       </p:sp>
       <p:sp>
         <p:nvSpPr>
-          <p:cNvPr id="97" name="Text 90"/>
+          <p:cNvPr id="98" name="Text 91"/>
           <p:cNvSpPr/>
           <p:nvPr/>
         </p:nvSpPr>
@@ -4514,7 +4539,7 @@
       </p:sp>
       <p:sp>
         <p:nvSpPr>
-          <p:cNvPr id="98" name="Text 91"/>
+          <p:cNvPr id="99" name="Text 92"/>
           <p:cNvSpPr/>
           <p:nvPr/>
         </p:nvSpPr>
@@ -4553,7 +4578,7 @@
       </p:sp>
       <p:sp>
         <p:nvSpPr>
-          <p:cNvPr id="99" name="Text 92"/>
+          <p:cNvPr id="100" name="Text 93"/>
           <p:cNvSpPr/>
           <p:nvPr/>
         </p:nvSpPr>
@@ -4592,7 +4617,7 @@
       </p:sp>
       <p:sp>
         <p:nvSpPr>
-          <p:cNvPr id="100" name="Text 93"/>
+          <p:cNvPr id="101" name="Text 94"/>
           <p:cNvSpPr/>
           <p:nvPr/>
         </p:nvSpPr>
@@ -4631,7 +4656,7 @@
       </p:sp>
       <p:sp>
         <p:nvSpPr>
-          <p:cNvPr id="101" name="Text 94"/>
+          <p:cNvPr id="102" name="Text 95"/>
           <p:cNvSpPr/>
           <p:nvPr/>
         </p:nvSpPr>
@@ -4670,7 +4695,7 @@
       </p:sp>
       <p:sp>
         <p:nvSpPr>
-          <p:cNvPr id="102" name="Text 95"/>
+          <p:cNvPr id="103" name="Text 96"/>
           <p:cNvSpPr/>
           <p:nvPr/>
         </p:nvSpPr>
@@ -4709,7 +4734,7 @@
       </p:sp>
       <p:sp>
         <p:nvSpPr>
-          <p:cNvPr id="103" name="Text 96"/>
+          <p:cNvPr id="104" name="Text 97"/>
           <p:cNvSpPr/>
           <p:nvPr/>
         </p:nvSpPr>
@@ -4748,7 +4773,7 @@
       </p:sp>
       <p:sp>
         <p:nvSpPr>
-          <p:cNvPr id="104" name="Text 97"/>
+          <p:cNvPr id="105" name="Text 98"/>
           <p:cNvSpPr/>
           <p:nvPr/>
         </p:nvSpPr>
@@ -4787,7 +4812,7 @@
       </p:sp>
       <p:sp>
         <p:nvSpPr>
-          <p:cNvPr id="105" name="Text 98"/>
+          <p:cNvPr id="106" name="Text 99"/>
           <p:cNvSpPr/>
           <p:nvPr/>
         </p:nvSpPr>
@@ -4826,7 +4851,7 @@
       </p:sp>
       <p:sp>
         <p:nvSpPr>
-          <p:cNvPr id="106" name="Text 99"/>
+          <p:cNvPr id="107" name="Text 100"/>
           <p:cNvSpPr/>
           <p:nvPr/>
         </p:nvSpPr>
@@ -4865,7 +4890,7 @@
       </p:sp>
       <p:sp>
         <p:nvSpPr>
-          <p:cNvPr id="107" name="Text 100"/>
+          <p:cNvPr id="108" name="Text 101"/>
           <p:cNvSpPr/>
           <p:nvPr/>
         </p:nvSpPr>
@@ -4904,7 +4929,7 @@
       </p:sp>
       <p:sp>
         <p:nvSpPr>
-          <p:cNvPr id="108" name="Text 101"/>
+          <p:cNvPr id="109" name="Text 102"/>
           <p:cNvSpPr/>
           <p:nvPr/>
         </p:nvSpPr>
@@ -4943,7 +4968,7 @@
       </p:sp>
       <p:sp>
         <p:nvSpPr>
-          <p:cNvPr id="109" name="Text 102"/>
+          <p:cNvPr id="110" name="Text 103"/>
           <p:cNvSpPr/>
           <p:nvPr/>
         </p:nvSpPr>
@@ -4982,7 +5007,7 @@
       </p:sp>
       <p:sp>
         <p:nvSpPr>
-          <p:cNvPr id="110" name="Text 103"/>
+          <p:cNvPr id="111" name="Text 104"/>
           <p:cNvSpPr/>
           <p:nvPr/>
         </p:nvSpPr>
@@ -5021,7 +5046,7 @@
       </p:sp>
       <p:sp>
         <p:nvSpPr>
-          <p:cNvPr id="111" name="Text 104"/>
+          <p:cNvPr id="112" name="Text 105"/>
           <p:cNvSpPr/>
           <p:nvPr/>
         </p:nvSpPr>
@@ -5060,7 +5085,7 @@
       </p:sp>
       <p:sp>
         <p:nvSpPr>
-          <p:cNvPr id="112" name="Text 105"/>
+          <p:cNvPr id="113" name="Text 106"/>
           <p:cNvSpPr/>
           <p:nvPr/>
         </p:nvSpPr>
@@ -5099,7 +5124,7 @@
       </p:sp>
       <p:sp>
         <p:nvSpPr>
-          <p:cNvPr id="113" name="Text 106"/>
+          <p:cNvPr id="114" name="Text 107"/>
           <p:cNvSpPr/>
           <p:nvPr/>
         </p:nvSpPr>
@@ -5138,7 +5163,7 @@
       </p:sp>
       <p:sp>
         <p:nvSpPr>
-          <p:cNvPr id="114" name="Text 107"/>
+          <p:cNvPr id="115" name="Text 108"/>
           <p:cNvSpPr/>
           <p:nvPr/>
         </p:nvSpPr>
@@ -5191,7 +5216,7 @@
       </p:sp>
       <p:sp>
         <p:nvSpPr>
-          <p:cNvPr id="115" name="Text 108"/>
+          <p:cNvPr id="116" name="Text 109"/>
           <p:cNvSpPr/>
           <p:nvPr/>
         </p:nvSpPr>
@@ -5244,7 +5269,7 @@
       </p:sp>
       <p:sp>
         <p:nvSpPr>
-          <p:cNvPr id="116" name="Text 109"/>
+          <p:cNvPr id="117" name="Text 110"/>
           <p:cNvSpPr/>
           <p:nvPr/>
         </p:nvSpPr>
@@ -5297,7 +5322,7 @@
       </p:sp>
       <p:sp>
         <p:nvSpPr>
-          <p:cNvPr id="117" name="Text 110"/>
+          <p:cNvPr id="118" name="Text 111"/>
           <p:cNvSpPr/>
           <p:nvPr/>
         </p:nvSpPr>
@@ -5350,7 +5375,7 @@
       </p:sp>
       <p:sp>
         <p:nvSpPr>
-          <p:cNvPr id="118" name="Text 111"/>
+          <p:cNvPr id="119" name="Text 112"/>
           <p:cNvSpPr/>
           <p:nvPr/>
         </p:nvSpPr>
@@ -5403,7 +5428,7 @@
       </p:sp>
       <p:sp>
         <p:nvSpPr>
-          <p:cNvPr id="119" name="Text 112"/>
+          <p:cNvPr id="120" name="Text 113"/>
           <p:cNvSpPr/>
           <p:nvPr/>
         </p:nvSpPr>

--- a/videos/machine-learning/03_ridger_regression_gradient_descent/recreated_pptx/slide_050_recreated.pptx
+++ b/videos/machine-learning/03_ridger_regression_gradient_descent/recreated_pptx/slide_050_recreated.pptx
@@ -1061,38 +1061,258 @@
         </p:nvSpPr>
         <p:spPr>
           <a:xfrm>
-            <a:off x="1117600" y="787400"/>
-            <a:ext cx="279400" cy="152400"/>
-          </a:xfrm>
-          <a:prstGeom prst="rect">
-            <a:avLst/>
-          </a:prstGeom>
-          <a:noFill/>
-          <a:ln/>
-        </p:spPr>
-        <p:txBody>
-          <a:bodyPr wrap="square" lIns="0" tIns="0" rIns="0" bIns="0" rtlCol="0" anchor="ctr"/>
-          <a:lstStyle/>
-          <a:p>
-            <a:pPr algn="ctr" indent="0" marL="0">
-              <a:buNone/>
-            </a:pPr>
-            <a:r>
-              <a:rPr lang="en-US" sz="1200" i="1" dirty="0">
-                <a:solidFill>
-                  <a:srgbClr val="000000"/>
-                </a:solidFill>
-                <a:latin typeface="Arial" pitchFamily="34" charset="0"/>
-                <a:ea typeface="Arial" pitchFamily="34" charset="-122"/>
-                <a:cs typeface="Arial" pitchFamily="34" charset="-120"/>
-              </a:rPr>
-              <a:t>x</a:t>
-            </a:r>
-            <a:pPr algn="ctr" indent="0" marL="0">
-              <a:buNone/>
-            </a:pPr>
-            <a:r>
-              <a:rPr lang="en-US" sz="800" baseline="-40000" dirty="0">
+            <a:off x="1079500" y="812800"/>
+            <a:ext cx="284480" cy="127000"/>
+          </a:xfrm>
+          <a:prstGeom prst="rect">
+            <a:avLst/>
+          </a:prstGeom>
+          <a:noFill/>
+          <a:ln/>
+        </p:spPr>
+        <p:txBody>
+          <a:bodyPr wrap="square" lIns="0" tIns="0" rIns="0" bIns="0" rtlCol="0" anchor="ctr"/>
+          <a:lstStyle/>
+          <a:p>
+            <a:pPr algn="ctr" indent="0" marL="0">
+              <a:buNone/>
+            </a:pPr>
+            <a:r>
+              <a:rPr lang="en-US" sz="1100" b="1" dirty="0">
+                <a:solidFill>
+                  <a:srgbClr val="000000"/>
+                </a:solidFill>
+                <a:latin typeface="Arial" pitchFamily="34" charset="0"/>
+                <a:ea typeface="Arial" pitchFamily="34" charset="-122"/>
+                <a:cs typeface="Arial" pitchFamily="34" charset="-120"/>
+              </a:rPr>
+              <a:t>x₁</a:t>
+            </a:r>
+            <a:endParaRPr lang="en-US" sz="1100" dirty="0"/>
+          </a:p>
+        </p:txBody>
+      </p:sp>
+      <p:sp>
+        <p:nvSpPr>
+          <p:cNvPr id="10" name="Text 8"/>
+          <p:cNvSpPr/>
+          <p:nvPr/>
+        </p:nvSpPr>
+        <p:spPr>
+          <a:xfrm>
+            <a:off x="1363980" y="812800"/>
+            <a:ext cx="284480" cy="127000"/>
+          </a:xfrm>
+          <a:prstGeom prst="rect">
+            <a:avLst/>
+          </a:prstGeom>
+          <a:noFill/>
+          <a:ln/>
+        </p:spPr>
+        <p:txBody>
+          <a:bodyPr wrap="square" lIns="0" tIns="0" rIns="0" bIns="0" rtlCol="0" anchor="ctr"/>
+          <a:lstStyle/>
+          <a:p>
+            <a:pPr algn="ctr" indent="0" marL="0">
+              <a:buNone/>
+            </a:pPr>
+            <a:r>
+              <a:rPr lang="en-US" sz="1100" b="1" dirty="0">
+                <a:solidFill>
+                  <a:srgbClr val="000000"/>
+                </a:solidFill>
+                <a:latin typeface="Arial" pitchFamily="34" charset="0"/>
+                <a:ea typeface="Arial" pitchFamily="34" charset="-122"/>
+                <a:cs typeface="Arial" pitchFamily="34" charset="-120"/>
+              </a:rPr>
+              <a:t>x₂</a:t>
+            </a:r>
+            <a:endParaRPr lang="en-US" sz="1100" dirty="0"/>
+          </a:p>
+        </p:txBody>
+      </p:sp>
+      <p:sp>
+        <p:nvSpPr>
+          <p:cNvPr id="11" name="Text 9"/>
+          <p:cNvSpPr/>
+          <p:nvPr/>
+        </p:nvSpPr>
+        <p:spPr>
+          <a:xfrm>
+            <a:off x="1648460" y="812800"/>
+            <a:ext cx="284480" cy="127000"/>
+          </a:xfrm>
+          <a:prstGeom prst="rect">
+            <a:avLst/>
+          </a:prstGeom>
+          <a:noFill/>
+          <a:ln/>
+        </p:spPr>
+        <p:txBody>
+          <a:bodyPr wrap="square" lIns="0" tIns="0" rIns="0" bIns="0" rtlCol="0" anchor="ctr"/>
+          <a:lstStyle/>
+          <a:p>
+            <a:pPr algn="ctr" indent="0" marL="0">
+              <a:buNone/>
+            </a:pPr>
+            <a:r>
+              <a:rPr lang="en-US" sz="1100" b="1" dirty="0">
+                <a:solidFill>
+                  <a:srgbClr val="000000"/>
+                </a:solidFill>
+                <a:latin typeface="Arial" pitchFamily="34" charset="0"/>
+                <a:ea typeface="Arial" pitchFamily="34" charset="-122"/>
+                <a:cs typeface="Arial" pitchFamily="34" charset="-120"/>
+              </a:rPr>
+              <a:t>x₃</a:t>
+            </a:r>
+            <a:endParaRPr lang="en-US" sz="1100" dirty="0"/>
+          </a:p>
+        </p:txBody>
+      </p:sp>
+      <p:sp>
+        <p:nvSpPr>
+          <p:cNvPr id="12" name="Text 10"/>
+          <p:cNvSpPr/>
+          <p:nvPr/>
+        </p:nvSpPr>
+        <p:spPr>
+          <a:xfrm>
+            <a:off x="1932940" y="812800"/>
+            <a:ext cx="284480" cy="127000"/>
+          </a:xfrm>
+          <a:prstGeom prst="rect">
+            <a:avLst/>
+          </a:prstGeom>
+          <a:noFill/>
+          <a:ln/>
+        </p:spPr>
+        <p:txBody>
+          <a:bodyPr wrap="square" lIns="0" tIns="0" rIns="0" bIns="0" rtlCol="0" anchor="ctr"/>
+          <a:lstStyle/>
+          <a:p>
+            <a:pPr algn="ctr" indent="0" marL="0">
+              <a:buNone/>
+            </a:pPr>
+            <a:r>
+              <a:rPr lang="en-US" sz="1100" b="1" dirty="0">
+                <a:solidFill>
+                  <a:srgbClr val="000000"/>
+                </a:solidFill>
+                <a:latin typeface="Arial" pitchFamily="34" charset="0"/>
+                <a:ea typeface="Arial" pitchFamily="34" charset="-122"/>
+                <a:cs typeface="Arial" pitchFamily="34" charset="-120"/>
+              </a:rPr>
+              <a:t>x₄</a:t>
+            </a:r>
+            <a:endParaRPr lang="en-US" sz="1100" dirty="0"/>
+          </a:p>
+        </p:txBody>
+      </p:sp>
+      <p:sp>
+        <p:nvSpPr>
+          <p:cNvPr id="13" name="Text 11"/>
+          <p:cNvSpPr/>
+          <p:nvPr/>
+        </p:nvSpPr>
+        <p:spPr>
+          <a:xfrm>
+            <a:off x="2217420" y="812800"/>
+            <a:ext cx="284480" cy="127000"/>
+          </a:xfrm>
+          <a:prstGeom prst="rect">
+            <a:avLst/>
+          </a:prstGeom>
+          <a:noFill/>
+          <a:ln/>
+        </p:spPr>
+        <p:txBody>
+          <a:bodyPr wrap="square" lIns="0" tIns="0" rIns="0" bIns="0" rtlCol="0" anchor="ctr"/>
+          <a:lstStyle/>
+          <a:p>
+            <a:pPr algn="ctr" indent="0" marL="0">
+              <a:buNone/>
+            </a:pPr>
+            <a:r>
+              <a:rPr lang="en-US" sz="1100" b="1" dirty="0">
+                <a:solidFill>
+                  <a:srgbClr val="000000"/>
+                </a:solidFill>
+                <a:latin typeface="Arial" pitchFamily="34" charset="0"/>
+                <a:ea typeface="Arial" pitchFamily="34" charset="-122"/>
+                <a:cs typeface="Arial" pitchFamily="34" charset="-120"/>
+              </a:rPr>
+              <a:t>x₅</a:t>
+            </a:r>
+            <a:endParaRPr lang="en-US" sz="1100" dirty="0"/>
+          </a:p>
+        </p:txBody>
+      </p:sp>
+      <p:sp>
+        <p:nvSpPr>
+          <p:cNvPr id="14" name="Text 12"/>
+          <p:cNvSpPr/>
+          <p:nvPr/>
+        </p:nvSpPr>
+        <p:spPr>
+          <a:xfrm>
+            <a:off x="2501900" y="812800"/>
+            <a:ext cx="284480" cy="127000"/>
+          </a:xfrm>
+          <a:prstGeom prst="rect">
+            <a:avLst/>
+          </a:prstGeom>
+          <a:noFill/>
+          <a:ln/>
+        </p:spPr>
+        <p:txBody>
+          <a:bodyPr wrap="square" lIns="0" tIns="0" rIns="0" bIns="0" rtlCol="0" anchor="ctr"/>
+          <a:lstStyle/>
+          <a:p>
+            <a:pPr algn="ctr" indent="0" marL="0">
+              <a:buNone/>
+            </a:pPr>
+            <a:r>
+              <a:rPr lang="en-US" sz="1100" b="1" dirty="0">
+                <a:solidFill>
+                  <a:srgbClr val="000000"/>
+                </a:solidFill>
+                <a:latin typeface="Arial" pitchFamily="34" charset="0"/>
+                <a:ea typeface="Arial" pitchFamily="34" charset="-122"/>
+                <a:cs typeface="Arial" pitchFamily="34" charset="-120"/>
+              </a:rPr>
+              <a:t>x₆</a:t>
+            </a:r>
+            <a:endParaRPr lang="en-US" sz="1100" dirty="0"/>
+          </a:p>
+        </p:txBody>
+      </p:sp>
+      <p:sp>
+        <p:nvSpPr>
+          <p:cNvPr id="15" name="Text 13"/>
+          <p:cNvSpPr/>
+          <p:nvPr/>
+        </p:nvSpPr>
+        <p:spPr>
+          <a:xfrm>
+            <a:off x="1079500" y="990600"/>
+            <a:ext cx="284480" cy="133350"/>
+          </a:xfrm>
+          <a:prstGeom prst="rect">
+            <a:avLst/>
+          </a:prstGeom>
+          <a:noFill/>
+          <a:ln/>
+        </p:spPr>
+        <p:txBody>
+          <a:bodyPr wrap="square" lIns="0" tIns="0" rIns="0" bIns="0" rtlCol="0" anchor="ctr"/>
+          <a:lstStyle/>
+          <a:p>
+            <a:pPr algn="ctr" indent="0" marL="0">
+              <a:buNone/>
+            </a:pPr>
+            <a:r>
+              <a:rPr lang="en-US" sz="1100" dirty="0">
                 <a:solidFill>
                   <a:srgbClr val="000000"/>
                 </a:solidFill>
@@ -1102,50 +1322,36 @@
               </a:rPr>
               <a:t>1</a:t>
             </a:r>
-            <a:endParaRPr lang="en-US" sz="1200" dirty="0"/>
-          </a:p>
-        </p:txBody>
-      </p:sp>
-      <p:sp>
-        <p:nvSpPr>
-          <p:cNvPr id="10" name="Text 8"/>
-          <p:cNvSpPr/>
-          <p:nvPr/>
-        </p:nvSpPr>
-        <p:spPr>
-          <a:xfrm>
-            <a:off x="1397000" y="787400"/>
-            <a:ext cx="279400" cy="152400"/>
-          </a:xfrm>
-          <a:prstGeom prst="rect">
-            <a:avLst/>
-          </a:prstGeom>
-          <a:noFill/>
-          <a:ln/>
-        </p:spPr>
-        <p:txBody>
-          <a:bodyPr wrap="square" lIns="0" tIns="0" rIns="0" bIns="0" rtlCol="0" anchor="ctr"/>
-          <a:lstStyle/>
-          <a:p>
-            <a:pPr algn="ctr" indent="0" marL="0">
-              <a:buNone/>
-            </a:pPr>
-            <a:r>
-              <a:rPr lang="en-US" sz="1200" i="1" dirty="0">
-                <a:solidFill>
-                  <a:srgbClr val="000000"/>
-                </a:solidFill>
-                <a:latin typeface="Arial" pitchFamily="34" charset="0"/>
-                <a:ea typeface="Arial" pitchFamily="34" charset="-122"/>
-                <a:cs typeface="Arial" pitchFamily="34" charset="-120"/>
-              </a:rPr>
-              <a:t>x</a:t>
-            </a:r>
-            <a:pPr algn="ctr" indent="0" marL="0">
-              <a:buNone/>
-            </a:pPr>
-            <a:r>
-              <a:rPr lang="en-US" sz="800" baseline="-40000" dirty="0">
+            <a:endParaRPr lang="en-US" sz="1100" dirty="0"/>
+          </a:p>
+        </p:txBody>
+      </p:sp>
+      <p:sp>
+        <p:nvSpPr>
+          <p:cNvPr id="16" name="Text 14"/>
+          <p:cNvSpPr/>
+          <p:nvPr/>
+        </p:nvSpPr>
+        <p:spPr>
+          <a:xfrm>
+            <a:off x="1363980" y="990600"/>
+            <a:ext cx="284480" cy="133350"/>
+          </a:xfrm>
+          <a:prstGeom prst="rect">
+            <a:avLst/>
+          </a:prstGeom>
+          <a:noFill/>
+          <a:ln/>
+        </p:spPr>
+        <p:txBody>
+          <a:bodyPr wrap="square" lIns="0" tIns="0" rIns="0" bIns="0" rtlCol="0" anchor="ctr"/>
+          <a:lstStyle/>
+          <a:p>
+            <a:pPr algn="ctr" indent="0" marL="0">
+              <a:buNone/>
+            </a:pPr>
+            <a:r>
+              <a:rPr lang="en-US" sz="1100" dirty="0">
                 <a:solidFill>
                   <a:srgbClr val="000000"/>
                 </a:solidFill>
@@ -1155,103 +1361,309 @@
               </a:rPr>
               <a:t>2</a:t>
             </a:r>
-            <a:endParaRPr lang="en-US" sz="1200" dirty="0"/>
-          </a:p>
-        </p:txBody>
-      </p:sp>
-      <p:sp>
-        <p:nvSpPr>
-          <p:cNvPr id="11" name="Text 9"/>
-          <p:cNvSpPr/>
-          <p:nvPr/>
-        </p:nvSpPr>
-        <p:spPr>
-          <a:xfrm>
-            <a:off x="1676400" y="787400"/>
-            <a:ext cx="279400" cy="152400"/>
-          </a:xfrm>
-          <a:prstGeom prst="rect">
-            <a:avLst/>
-          </a:prstGeom>
-          <a:noFill/>
-          <a:ln/>
-        </p:spPr>
-        <p:txBody>
-          <a:bodyPr wrap="square" lIns="0" tIns="0" rIns="0" bIns="0" rtlCol="0" anchor="ctr"/>
-          <a:lstStyle/>
-          <a:p>
-            <a:pPr algn="ctr" indent="0" marL="0">
-              <a:buNone/>
-            </a:pPr>
-            <a:r>
-              <a:rPr lang="en-US" sz="1200" i="1" dirty="0">
-                <a:solidFill>
-                  <a:srgbClr val="000000"/>
-                </a:solidFill>
-                <a:latin typeface="Arial" pitchFamily="34" charset="0"/>
-                <a:ea typeface="Arial" pitchFamily="34" charset="-122"/>
-                <a:cs typeface="Arial" pitchFamily="34" charset="-120"/>
-              </a:rPr>
-              <a:t>x</a:t>
-            </a:r>
-            <a:pPr algn="ctr" indent="0" marL="0">
-              <a:buNone/>
-            </a:pPr>
-            <a:r>
-              <a:rPr lang="en-US" sz="800" baseline="-40000" dirty="0">
-                <a:solidFill>
-                  <a:srgbClr val="000000"/>
-                </a:solidFill>
-                <a:latin typeface="Arial" pitchFamily="34" charset="0"/>
-                <a:ea typeface="Arial" pitchFamily="34" charset="-122"/>
-                <a:cs typeface="Arial" pitchFamily="34" charset="-120"/>
-              </a:rPr>
-              <a:t>3</a:t>
-            </a:r>
-            <a:endParaRPr lang="en-US" sz="1200" dirty="0"/>
-          </a:p>
-        </p:txBody>
-      </p:sp>
-      <p:sp>
-        <p:nvSpPr>
-          <p:cNvPr id="12" name="Text 10"/>
-          <p:cNvSpPr/>
-          <p:nvPr/>
-        </p:nvSpPr>
-        <p:spPr>
-          <a:xfrm>
-            <a:off x="1968500" y="787400"/>
-            <a:ext cx="279400" cy="152400"/>
-          </a:xfrm>
-          <a:prstGeom prst="rect">
-            <a:avLst/>
-          </a:prstGeom>
-          <a:noFill/>
-          <a:ln/>
-        </p:spPr>
-        <p:txBody>
-          <a:bodyPr wrap="square" lIns="0" tIns="0" rIns="0" bIns="0" rtlCol="0" anchor="ctr"/>
-          <a:lstStyle/>
-          <a:p>
-            <a:pPr algn="ctr" indent="0" marL="0">
-              <a:buNone/>
-            </a:pPr>
-            <a:r>
-              <a:rPr lang="en-US" sz="1200" i="1" dirty="0">
-                <a:solidFill>
-                  <a:srgbClr val="000000"/>
-                </a:solidFill>
-                <a:latin typeface="Arial" pitchFamily="34" charset="0"/>
-                <a:ea typeface="Arial" pitchFamily="34" charset="-122"/>
-                <a:cs typeface="Arial" pitchFamily="34" charset="-120"/>
-              </a:rPr>
-              <a:t>x</a:t>
-            </a:r>
-            <a:pPr algn="ctr" indent="0" marL="0">
-              <a:buNone/>
-            </a:pPr>
-            <a:r>
-              <a:rPr lang="en-US" sz="800" baseline="-40000" dirty="0">
+            <a:endParaRPr lang="en-US" sz="1100" dirty="0"/>
+          </a:p>
+        </p:txBody>
+      </p:sp>
+      <p:sp>
+        <p:nvSpPr>
+          <p:cNvPr id="17" name="Text 15"/>
+          <p:cNvSpPr/>
+          <p:nvPr/>
+        </p:nvSpPr>
+        <p:spPr>
+          <a:xfrm>
+            <a:off x="1648460" y="990600"/>
+            <a:ext cx="284480" cy="133350"/>
+          </a:xfrm>
+          <a:prstGeom prst="rect">
+            <a:avLst/>
+          </a:prstGeom>
+          <a:noFill/>
+          <a:ln/>
+        </p:spPr>
+        <p:txBody>
+          <a:bodyPr wrap="square" lIns="0" tIns="0" rIns="0" bIns="0" rtlCol="0" anchor="ctr"/>
+          <a:lstStyle/>
+          <a:p>
+            <a:pPr algn="ctr" indent="0" marL="0">
+              <a:buNone/>
+            </a:pPr>
+            <a:r>
+              <a:rPr lang="en-US" sz="1100" dirty="0">
+                <a:solidFill>
+                  <a:srgbClr val="000000"/>
+                </a:solidFill>
+                <a:latin typeface="Arial" pitchFamily="34" charset="0"/>
+                <a:ea typeface="Arial" pitchFamily="34" charset="-122"/>
+                <a:cs typeface="Arial" pitchFamily="34" charset="-120"/>
+              </a:rPr>
+              <a:t>1</a:t>
+            </a:r>
+            <a:endParaRPr lang="en-US" sz="1100" dirty="0"/>
+          </a:p>
+        </p:txBody>
+      </p:sp>
+      <p:sp>
+        <p:nvSpPr>
+          <p:cNvPr id="18" name="Text 16"/>
+          <p:cNvSpPr/>
+          <p:nvPr/>
+        </p:nvSpPr>
+        <p:spPr>
+          <a:xfrm>
+            <a:off x="1932940" y="990600"/>
+            <a:ext cx="284480" cy="133350"/>
+          </a:xfrm>
+          <a:prstGeom prst="rect">
+            <a:avLst/>
+          </a:prstGeom>
+          <a:noFill/>
+          <a:ln/>
+        </p:spPr>
+        <p:txBody>
+          <a:bodyPr wrap="square" lIns="0" tIns="0" rIns="0" bIns="0" rtlCol="0" anchor="ctr"/>
+          <a:lstStyle/>
+          <a:p>
+            <a:pPr algn="ctr" indent="0" marL="0">
+              <a:buNone/>
+            </a:pPr>
+            <a:r>
+              <a:rPr lang="en-US" sz="1100" dirty="0">
+                <a:solidFill>
+                  <a:srgbClr val="000000"/>
+                </a:solidFill>
+                <a:latin typeface="Arial" pitchFamily="34" charset="0"/>
+                <a:ea typeface="Arial" pitchFamily="34" charset="-122"/>
+                <a:cs typeface="Arial" pitchFamily="34" charset="-120"/>
+              </a:rPr>
+              <a:t>5</a:t>
+            </a:r>
+            <a:endParaRPr lang="en-US" sz="1100" dirty="0"/>
+          </a:p>
+        </p:txBody>
+      </p:sp>
+      <p:sp>
+        <p:nvSpPr>
+          <p:cNvPr id="19" name="Text 17"/>
+          <p:cNvSpPr/>
+          <p:nvPr/>
+        </p:nvSpPr>
+        <p:spPr>
+          <a:xfrm>
+            <a:off x="2217420" y="990600"/>
+            <a:ext cx="284480" cy="133350"/>
+          </a:xfrm>
+          <a:prstGeom prst="rect">
+            <a:avLst/>
+          </a:prstGeom>
+          <a:noFill/>
+          <a:ln/>
+        </p:spPr>
+        <p:txBody>
+          <a:bodyPr wrap="square" lIns="0" tIns="0" rIns="0" bIns="0" rtlCol="0" anchor="ctr"/>
+          <a:lstStyle/>
+          <a:p>
+            <a:pPr algn="ctr" indent="0" marL="0">
+              <a:buNone/>
+            </a:pPr>
+            <a:r>
+              <a:rPr lang="en-US" sz="1100" dirty="0">
+                <a:solidFill>
+                  <a:srgbClr val="000000"/>
+                </a:solidFill>
+                <a:latin typeface="Arial" pitchFamily="34" charset="0"/>
+                <a:ea typeface="Arial" pitchFamily="34" charset="-122"/>
+                <a:cs typeface="Arial" pitchFamily="34" charset="-120"/>
+              </a:rPr>
+              <a:t>6</a:t>
+            </a:r>
+            <a:endParaRPr lang="en-US" sz="1100" dirty="0"/>
+          </a:p>
+        </p:txBody>
+      </p:sp>
+      <p:sp>
+        <p:nvSpPr>
+          <p:cNvPr id="20" name="Text 18"/>
+          <p:cNvSpPr/>
+          <p:nvPr/>
+        </p:nvSpPr>
+        <p:spPr>
+          <a:xfrm>
+            <a:off x="2501900" y="990600"/>
+            <a:ext cx="284480" cy="133350"/>
+          </a:xfrm>
+          <a:prstGeom prst="rect">
+            <a:avLst/>
+          </a:prstGeom>
+          <a:noFill/>
+          <a:ln/>
+        </p:spPr>
+        <p:txBody>
+          <a:bodyPr wrap="square" lIns="0" tIns="0" rIns="0" bIns="0" rtlCol="0" anchor="ctr"/>
+          <a:lstStyle/>
+          <a:p>
+            <a:pPr algn="ctr" indent="0" marL="0">
+              <a:buNone/>
+            </a:pPr>
+            <a:r>
+              <a:rPr lang="en-US" sz="1100" dirty="0">
+                <a:solidFill>
+                  <a:srgbClr val="000000"/>
+                </a:solidFill>
+                <a:latin typeface="Arial" pitchFamily="34" charset="0"/>
+                <a:ea typeface="Arial" pitchFamily="34" charset="-122"/>
+                <a:cs typeface="Arial" pitchFamily="34" charset="-120"/>
+              </a:rPr>
+              <a:t>6</a:t>
+            </a:r>
+            <a:endParaRPr lang="en-US" sz="1100" dirty="0"/>
+          </a:p>
+        </p:txBody>
+      </p:sp>
+      <p:sp>
+        <p:nvSpPr>
+          <p:cNvPr id="21" name="Text 19"/>
+          <p:cNvSpPr/>
+          <p:nvPr/>
+        </p:nvSpPr>
+        <p:spPr>
+          <a:xfrm>
+            <a:off x="1079500" y="1231900"/>
+            <a:ext cx="284480" cy="127000"/>
+          </a:xfrm>
+          <a:prstGeom prst="rect">
+            <a:avLst/>
+          </a:prstGeom>
+          <a:noFill/>
+          <a:ln/>
+        </p:spPr>
+        <p:txBody>
+          <a:bodyPr wrap="square" lIns="0" tIns="0" rIns="0" bIns="0" rtlCol="0" anchor="ctr"/>
+          <a:lstStyle/>
+          <a:p>
+            <a:pPr algn="ctr" indent="0" marL="0">
+              <a:buNone/>
+            </a:pPr>
+            <a:r>
+              <a:rPr lang="en-US" sz="1100" dirty="0">
+                <a:solidFill>
+                  <a:srgbClr val="000000"/>
+                </a:solidFill>
+                <a:latin typeface="Arial" pitchFamily="34" charset="0"/>
+                <a:ea typeface="Arial" pitchFamily="34" charset="-122"/>
+                <a:cs typeface="Arial" pitchFamily="34" charset="-120"/>
+              </a:rPr>
+              <a:t>1</a:t>
+            </a:r>
+            <a:endParaRPr lang="en-US" sz="1100" dirty="0"/>
+          </a:p>
+        </p:txBody>
+      </p:sp>
+      <p:sp>
+        <p:nvSpPr>
+          <p:cNvPr id="22" name="Text 20"/>
+          <p:cNvSpPr/>
+          <p:nvPr/>
+        </p:nvSpPr>
+        <p:spPr>
+          <a:xfrm>
+            <a:off x="1363980" y="1231900"/>
+            <a:ext cx="284480" cy="127000"/>
+          </a:xfrm>
+          <a:prstGeom prst="rect">
+            <a:avLst/>
+          </a:prstGeom>
+          <a:noFill/>
+          <a:ln/>
+        </p:spPr>
+        <p:txBody>
+          <a:bodyPr wrap="square" lIns="0" tIns="0" rIns="0" bIns="0" rtlCol="0" anchor="ctr"/>
+          <a:lstStyle/>
+          <a:p>
+            <a:pPr algn="ctr" indent="0" marL="0">
+              <a:buNone/>
+            </a:pPr>
+            <a:r>
+              <a:rPr lang="en-US" sz="1100" dirty="0">
+                <a:solidFill>
+                  <a:srgbClr val="000000"/>
+                </a:solidFill>
+                <a:latin typeface="Arial" pitchFamily="34" charset="0"/>
+                <a:ea typeface="Arial" pitchFamily="34" charset="-122"/>
+                <a:cs typeface="Arial" pitchFamily="34" charset="-120"/>
+              </a:rPr>
+              <a:t>1</a:t>
+            </a:r>
+            <a:endParaRPr lang="en-US" sz="1100" dirty="0"/>
+          </a:p>
+        </p:txBody>
+      </p:sp>
+      <p:sp>
+        <p:nvSpPr>
+          <p:cNvPr id="23" name="Text 21"/>
+          <p:cNvSpPr/>
+          <p:nvPr/>
+        </p:nvSpPr>
+        <p:spPr>
+          <a:xfrm>
+            <a:off x="1648460" y="1231900"/>
+            <a:ext cx="284480" cy="127000"/>
+          </a:xfrm>
+          <a:prstGeom prst="rect">
+            <a:avLst/>
+          </a:prstGeom>
+          <a:noFill/>
+          <a:ln/>
+        </p:spPr>
+        <p:txBody>
+          <a:bodyPr wrap="square" lIns="0" tIns="0" rIns="0" bIns="0" rtlCol="0" anchor="ctr"/>
+          <a:lstStyle/>
+          <a:p>
+            <a:pPr algn="ctr" indent="0" marL="0">
+              <a:buNone/>
+            </a:pPr>
+            <a:r>
+              <a:rPr lang="en-US" sz="1100" dirty="0">
+                <a:solidFill>
+                  <a:srgbClr val="000000"/>
+                </a:solidFill>
+                <a:latin typeface="Arial" pitchFamily="34" charset="0"/>
+                <a:ea typeface="Arial" pitchFamily="34" charset="-122"/>
+                <a:cs typeface="Arial" pitchFamily="34" charset="-120"/>
+              </a:rPr>
+              <a:t>2</a:t>
+            </a:r>
+            <a:endParaRPr lang="en-US" sz="1100" dirty="0"/>
+          </a:p>
+        </p:txBody>
+      </p:sp>
+      <p:sp>
+        <p:nvSpPr>
+          <p:cNvPr id="24" name="Text 22"/>
+          <p:cNvSpPr/>
+          <p:nvPr/>
+        </p:nvSpPr>
+        <p:spPr>
+          <a:xfrm>
+            <a:off x="1932940" y="1231900"/>
+            <a:ext cx="284480" cy="127000"/>
+          </a:xfrm>
+          <a:prstGeom prst="rect">
+            <a:avLst/>
+          </a:prstGeom>
+          <a:noFill/>
+          <a:ln/>
+        </p:spPr>
+        <p:txBody>
+          <a:bodyPr wrap="square" lIns="0" tIns="0" rIns="0" bIns="0" rtlCol="0" anchor="ctr"/>
+          <a:lstStyle/>
+          <a:p>
+            <a:pPr algn="ctr" indent="0" marL="0">
+              <a:buNone/>
+            </a:pPr>
+            <a:r>
+              <a:rPr lang="en-US" sz="1100" dirty="0">
                 <a:solidFill>
                   <a:srgbClr val="000000"/>
                 </a:solidFill>
@@ -1261,50 +1673,36 @@
               </a:rPr>
               <a:t>4</a:t>
             </a:r>
-            <a:endParaRPr lang="en-US" sz="1200" dirty="0"/>
-          </a:p>
-        </p:txBody>
-      </p:sp>
-      <p:sp>
-        <p:nvSpPr>
-          <p:cNvPr id="13" name="Text 11"/>
-          <p:cNvSpPr/>
-          <p:nvPr/>
-        </p:nvSpPr>
-        <p:spPr>
-          <a:xfrm>
-            <a:off x="2260600" y="787400"/>
-            <a:ext cx="279400" cy="152400"/>
-          </a:xfrm>
-          <a:prstGeom prst="rect">
-            <a:avLst/>
-          </a:prstGeom>
-          <a:noFill/>
-          <a:ln/>
-        </p:spPr>
-        <p:txBody>
-          <a:bodyPr wrap="square" lIns="0" tIns="0" rIns="0" bIns="0" rtlCol="0" anchor="ctr"/>
-          <a:lstStyle/>
-          <a:p>
-            <a:pPr algn="ctr" indent="0" marL="0">
-              <a:buNone/>
-            </a:pPr>
-            <a:r>
-              <a:rPr lang="en-US" sz="1200" i="1" dirty="0">
-                <a:solidFill>
-                  <a:srgbClr val="000000"/>
-                </a:solidFill>
-                <a:latin typeface="Arial" pitchFamily="34" charset="0"/>
-                <a:ea typeface="Arial" pitchFamily="34" charset="-122"/>
-                <a:cs typeface="Arial" pitchFamily="34" charset="-120"/>
-              </a:rPr>
-              <a:t>x</a:t>
-            </a:r>
-            <a:pPr algn="ctr" indent="0" marL="0">
-              <a:buNone/>
-            </a:pPr>
-            <a:r>
-              <a:rPr lang="en-US" sz="800" baseline="-40000" dirty="0">
+            <a:endParaRPr lang="en-US" sz="1100" dirty="0"/>
+          </a:p>
+        </p:txBody>
+      </p:sp>
+      <p:sp>
+        <p:nvSpPr>
+          <p:cNvPr id="25" name="Text 23"/>
+          <p:cNvSpPr/>
+          <p:nvPr/>
+        </p:nvSpPr>
+        <p:spPr>
+          <a:xfrm>
+            <a:off x="2217420" y="1231900"/>
+            <a:ext cx="284480" cy="127000"/>
+          </a:xfrm>
+          <a:prstGeom prst="rect">
+            <a:avLst/>
+          </a:prstGeom>
+          <a:noFill/>
+          <a:ln/>
+        </p:spPr>
+        <p:txBody>
+          <a:bodyPr wrap="square" lIns="0" tIns="0" rIns="0" bIns="0" rtlCol="0" anchor="ctr"/>
+          <a:lstStyle/>
+          <a:p>
+            <a:pPr algn="ctr" indent="0" marL="0">
+              <a:buNone/>
+            </a:pPr>
+            <a:r>
+              <a:rPr lang="en-US" sz="1100" dirty="0">
                 <a:solidFill>
                   <a:srgbClr val="000000"/>
                 </a:solidFill>
@@ -1314,50 +1712,36 @@
               </a:rPr>
               <a:t>5</a:t>
             </a:r>
-            <a:endParaRPr lang="en-US" sz="1200" dirty="0"/>
-          </a:p>
-        </p:txBody>
-      </p:sp>
-      <p:sp>
-        <p:nvSpPr>
-          <p:cNvPr id="14" name="Text 12"/>
-          <p:cNvSpPr/>
-          <p:nvPr/>
-        </p:nvSpPr>
-        <p:spPr>
-          <a:xfrm>
-            <a:off x="2578100" y="787400"/>
-            <a:ext cx="279400" cy="152400"/>
-          </a:xfrm>
-          <a:prstGeom prst="rect">
-            <a:avLst/>
-          </a:prstGeom>
-          <a:noFill/>
-          <a:ln/>
-        </p:spPr>
-        <p:txBody>
-          <a:bodyPr wrap="square" lIns="0" tIns="0" rIns="0" bIns="0" rtlCol="0" anchor="ctr"/>
-          <a:lstStyle/>
-          <a:p>
-            <a:pPr algn="ctr" indent="0" marL="0">
-              <a:buNone/>
-            </a:pPr>
-            <a:r>
-              <a:rPr lang="en-US" sz="1200" i="1" dirty="0">
-                <a:solidFill>
-                  <a:srgbClr val="000000"/>
-                </a:solidFill>
-                <a:latin typeface="Arial" pitchFamily="34" charset="0"/>
-                <a:ea typeface="Arial" pitchFamily="34" charset="-122"/>
-                <a:cs typeface="Arial" pitchFamily="34" charset="-120"/>
-              </a:rPr>
-              <a:t>x</a:t>
-            </a:r>
-            <a:pPr algn="ctr" indent="0" marL="0">
-              <a:buNone/>
-            </a:pPr>
-            <a:r>
-              <a:rPr lang="en-US" sz="800" baseline="-40000" dirty="0">
+            <a:endParaRPr lang="en-US" sz="1100" dirty="0"/>
+          </a:p>
+        </p:txBody>
+      </p:sp>
+      <p:sp>
+        <p:nvSpPr>
+          <p:cNvPr id="26" name="Text 24"/>
+          <p:cNvSpPr/>
+          <p:nvPr/>
+        </p:nvSpPr>
+        <p:spPr>
+          <a:xfrm>
+            <a:off x="2501900" y="1231900"/>
+            <a:ext cx="284480" cy="127000"/>
+          </a:xfrm>
+          <a:prstGeom prst="rect">
+            <a:avLst/>
+          </a:prstGeom>
+          <a:noFill/>
+          <a:ln/>
+        </p:spPr>
+        <p:txBody>
+          <a:bodyPr wrap="square" lIns="0" tIns="0" rIns="0" bIns="0" rtlCol="0" anchor="ctr"/>
+          <a:lstStyle/>
+          <a:p>
+            <a:pPr algn="ctr" indent="0" marL="0">
+              <a:buNone/>
+            </a:pPr>
+            <a:r>
+              <a:rPr lang="en-US" sz="1100" dirty="0">
                 <a:solidFill>
                   <a:srgbClr val="000000"/>
                 </a:solidFill>
@@ -1367,475 +1751,7 @@
               </a:rPr>
               <a:t>6</a:t>
             </a:r>
-            <a:endParaRPr lang="en-US" sz="1200" dirty="0"/>
-          </a:p>
-        </p:txBody>
-      </p:sp>
-      <p:sp>
-        <p:nvSpPr>
-          <p:cNvPr id="15" name="Text 13"/>
-          <p:cNvSpPr/>
-          <p:nvPr/>
-        </p:nvSpPr>
-        <p:spPr>
-          <a:xfrm>
-            <a:off x="1117600" y="1016000"/>
-            <a:ext cx="279400" cy="127000"/>
-          </a:xfrm>
-          <a:prstGeom prst="rect">
-            <a:avLst/>
-          </a:prstGeom>
-          <a:noFill/>
-          <a:ln/>
-        </p:spPr>
-        <p:txBody>
-          <a:bodyPr wrap="square" lIns="0" tIns="0" rIns="0" bIns="0" rtlCol="0" anchor="ctr"/>
-          <a:lstStyle/>
-          <a:p>
-            <a:pPr algn="ctr" indent="0" marL="0">
-              <a:buNone/>
-            </a:pPr>
-            <a:r>
-              <a:rPr lang="en-US" sz="1000" dirty="0">
-                <a:solidFill>
-                  <a:srgbClr val="000000"/>
-                </a:solidFill>
-                <a:latin typeface="Arial" pitchFamily="34" charset="0"/>
-                <a:ea typeface="Arial" pitchFamily="34" charset="-122"/>
-                <a:cs typeface="Arial" pitchFamily="34" charset="-120"/>
-              </a:rPr>
-              <a:t>(1)</a:t>
-            </a:r>
-            <a:endParaRPr lang="en-US" sz="1000" dirty="0"/>
-          </a:p>
-        </p:txBody>
-      </p:sp>
-      <p:sp>
-        <p:nvSpPr>
-          <p:cNvPr id="16" name="Text 14"/>
-          <p:cNvSpPr/>
-          <p:nvPr/>
-        </p:nvSpPr>
-        <p:spPr>
-          <a:xfrm>
-            <a:off x="1397000" y="1016000"/>
-            <a:ext cx="279400" cy="127000"/>
-          </a:xfrm>
-          <a:prstGeom prst="rect">
-            <a:avLst/>
-          </a:prstGeom>
-          <a:noFill/>
-          <a:ln/>
-        </p:spPr>
-        <p:txBody>
-          <a:bodyPr wrap="square" lIns="0" tIns="0" rIns="0" bIns="0" rtlCol="0" anchor="ctr"/>
-          <a:lstStyle/>
-          <a:p>
-            <a:pPr algn="ctr" indent="0" marL="0">
-              <a:buNone/>
-            </a:pPr>
-            <a:r>
-              <a:rPr lang="en-US" sz="1000" dirty="0">
-                <a:solidFill>
-                  <a:srgbClr val="000000"/>
-                </a:solidFill>
-                <a:latin typeface="Arial" pitchFamily="34" charset="0"/>
-                <a:ea typeface="Arial" pitchFamily="34" charset="-122"/>
-                <a:cs typeface="Arial" pitchFamily="34" charset="-120"/>
-              </a:rPr>
-              <a:t>(2)</a:t>
-            </a:r>
-            <a:endParaRPr lang="en-US" sz="1000" dirty="0"/>
-          </a:p>
-        </p:txBody>
-      </p:sp>
-      <p:sp>
-        <p:nvSpPr>
-          <p:cNvPr id="17" name="Text 15"/>
-          <p:cNvSpPr/>
-          <p:nvPr/>
-        </p:nvSpPr>
-        <p:spPr>
-          <a:xfrm>
-            <a:off x="1676400" y="1016000"/>
-            <a:ext cx="279400" cy="127000"/>
-          </a:xfrm>
-          <a:prstGeom prst="rect">
-            <a:avLst/>
-          </a:prstGeom>
-          <a:noFill/>
-          <a:ln/>
-        </p:spPr>
-        <p:txBody>
-          <a:bodyPr wrap="square" lIns="0" tIns="0" rIns="0" bIns="0" rtlCol="0" anchor="ctr"/>
-          <a:lstStyle/>
-          <a:p>
-            <a:pPr algn="ctr" indent="0" marL="0">
-              <a:buNone/>
-            </a:pPr>
-            <a:r>
-              <a:rPr lang="en-US" sz="1000" dirty="0">
-                <a:solidFill>
-                  <a:srgbClr val="000000"/>
-                </a:solidFill>
-                <a:latin typeface="Arial" pitchFamily="34" charset="0"/>
-                <a:ea typeface="Arial" pitchFamily="34" charset="-122"/>
-                <a:cs typeface="Arial" pitchFamily="34" charset="-120"/>
-              </a:rPr>
-              <a:t>(1)</a:t>
-            </a:r>
-            <a:endParaRPr lang="en-US" sz="1000" dirty="0"/>
-          </a:p>
-        </p:txBody>
-      </p:sp>
-      <p:sp>
-        <p:nvSpPr>
-          <p:cNvPr id="18" name="Text 16"/>
-          <p:cNvSpPr/>
-          <p:nvPr/>
-        </p:nvSpPr>
-        <p:spPr>
-          <a:xfrm>
-            <a:off x="1968500" y="1016000"/>
-            <a:ext cx="279400" cy="127000"/>
-          </a:xfrm>
-          <a:prstGeom prst="rect">
-            <a:avLst/>
-          </a:prstGeom>
-          <a:noFill/>
-          <a:ln/>
-        </p:spPr>
-        <p:txBody>
-          <a:bodyPr wrap="square" lIns="0" tIns="0" rIns="0" bIns="0" rtlCol="0" anchor="ctr"/>
-          <a:lstStyle/>
-          <a:p>
-            <a:pPr algn="ctr" indent="0" marL="0">
-              <a:buNone/>
-            </a:pPr>
-            <a:r>
-              <a:rPr lang="en-US" sz="1000" dirty="0">
-                <a:solidFill>
-                  <a:srgbClr val="000000"/>
-                </a:solidFill>
-                <a:latin typeface="Arial" pitchFamily="34" charset="0"/>
-                <a:ea typeface="Arial" pitchFamily="34" charset="-122"/>
-                <a:cs typeface="Arial" pitchFamily="34" charset="-120"/>
-              </a:rPr>
-              <a:t>(5)</a:t>
-            </a:r>
-            <a:endParaRPr lang="en-US" sz="1000" dirty="0"/>
-          </a:p>
-        </p:txBody>
-      </p:sp>
-      <p:sp>
-        <p:nvSpPr>
-          <p:cNvPr id="19" name="Text 17"/>
-          <p:cNvSpPr/>
-          <p:nvPr/>
-        </p:nvSpPr>
-        <p:spPr>
-          <a:xfrm>
-            <a:off x="2260600" y="1016000"/>
-            <a:ext cx="279400" cy="127000"/>
-          </a:xfrm>
-          <a:prstGeom prst="rect">
-            <a:avLst/>
-          </a:prstGeom>
-          <a:noFill/>
-          <a:ln/>
-        </p:spPr>
-        <p:txBody>
-          <a:bodyPr wrap="square" lIns="0" tIns="0" rIns="0" bIns="0" rtlCol="0" anchor="ctr"/>
-          <a:lstStyle/>
-          <a:p>
-            <a:pPr algn="ctr" indent="0" marL="0">
-              <a:buNone/>
-            </a:pPr>
-            <a:r>
-              <a:rPr lang="en-US" sz="1000" dirty="0">
-                <a:solidFill>
-                  <a:srgbClr val="000000"/>
-                </a:solidFill>
-                <a:latin typeface="Arial" pitchFamily="34" charset="0"/>
-                <a:ea typeface="Arial" pitchFamily="34" charset="-122"/>
-                <a:cs typeface="Arial" pitchFamily="34" charset="-120"/>
-              </a:rPr>
-              <a:t>(6)</a:t>
-            </a:r>
-            <a:endParaRPr lang="en-US" sz="1000" dirty="0"/>
-          </a:p>
-        </p:txBody>
-      </p:sp>
-      <p:sp>
-        <p:nvSpPr>
-          <p:cNvPr id="20" name="Text 18"/>
-          <p:cNvSpPr/>
-          <p:nvPr/>
-        </p:nvSpPr>
-        <p:spPr>
-          <a:xfrm>
-            <a:off x="2578100" y="1016000"/>
-            <a:ext cx="279400" cy="127000"/>
-          </a:xfrm>
-          <a:prstGeom prst="rect">
-            <a:avLst/>
-          </a:prstGeom>
-          <a:noFill/>
-          <a:ln/>
-        </p:spPr>
-        <p:txBody>
-          <a:bodyPr wrap="square" lIns="0" tIns="0" rIns="0" bIns="0" rtlCol="0" anchor="ctr"/>
-          <a:lstStyle/>
-          <a:p>
-            <a:pPr algn="ctr" indent="0" marL="0">
-              <a:buNone/>
-            </a:pPr>
-            <a:r>
-              <a:rPr lang="en-US" sz="1000" dirty="0">
-                <a:solidFill>
-                  <a:srgbClr val="000000"/>
-                </a:solidFill>
-                <a:latin typeface="Arial" pitchFamily="34" charset="0"/>
-                <a:ea typeface="Arial" pitchFamily="34" charset="-122"/>
-                <a:cs typeface="Arial" pitchFamily="34" charset="-120"/>
-              </a:rPr>
-              <a:t>(6)</a:t>
-            </a:r>
-            <a:endParaRPr lang="en-US" sz="1000" dirty="0"/>
-          </a:p>
-        </p:txBody>
-      </p:sp>
-      <p:sp>
-        <p:nvSpPr>
-          <p:cNvPr id="21" name="Text 19"/>
-          <p:cNvSpPr/>
-          <p:nvPr/>
-        </p:nvSpPr>
-        <p:spPr>
-          <a:xfrm>
-            <a:off x="1117600" y="1219200"/>
-            <a:ext cx="279400" cy="127000"/>
-          </a:xfrm>
-          <a:prstGeom prst="rect">
-            <a:avLst/>
-          </a:prstGeom>
-          <a:noFill/>
-          <a:ln/>
-        </p:spPr>
-        <p:txBody>
-          <a:bodyPr wrap="square" lIns="0" tIns="0" rIns="0" bIns="0" rtlCol="0" anchor="ctr"/>
-          <a:lstStyle/>
-          <a:p>
-            <a:pPr algn="ctr" indent="0" marL="0">
-              <a:buNone/>
-            </a:pPr>
-            <a:r>
-              <a:rPr lang="en-US" sz="1000" dirty="0">
-                <a:solidFill>
-                  <a:srgbClr val="000000"/>
-                </a:solidFill>
-                <a:latin typeface="Arial" pitchFamily="34" charset="0"/>
-                <a:ea typeface="Arial" pitchFamily="34" charset="-122"/>
-                <a:cs typeface="Arial" pitchFamily="34" charset="-120"/>
-              </a:rPr>
-              <a:t>(1)</a:t>
-            </a:r>
-            <a:endParaRPr lang="en-US" sz="1000" dirty="0"/>
-          </a:p>
-        </p:txBody>
-      </p:sp>
-      <p:sp>
-        <p:nvSpPr>
-          <p:cNvPr id="22" name="Text 20"/>
-          <p:cNvSpPr/>
-          <p:nvPr/>
-        </p:nvSpPr>
-        <p:spPr>
-          <a:xfrm>
-            <a:off x="1397000" y="1219200"/>
-            <a:ext cx="279400" cy="127000"/>
-          </a:xfrm>
-          <a:prstGeom prst="rect">
-            <a:avLst/>
-          </a:prstGeom>
-          <a:noFill/>
-          <a:ln/>
-        </p:spPr>
-        <p:txBody>
-          <a:bodyPr wrap="square" lIns="0" tIns="0" rIns="0" bIns="0" rtlCol="0" anchor="ctr"/>
-          <a:lstStyle/>
-          <a:p>
-            <a:pPr algn="ctr" indent="0" marL="0">
-              <a:buNone/>
-            </a:pPr>
-            <a:r>
-              <a:rPr lang="en-US" sz="1000" dirty="0">
-                <a:solidFill>
-                  <a:srgbClr val="000000"/>
-                </a:solidFill>
-                <a:latin typeface="Arial" pitchFamily="34" charset="0"/>
-                <a:ea typeface="Arial" pitchFamily="34" charset="-122"/>
-                <a:cs typeface="Arial" pitchFamily="34" charset="-120"/>
-              </a:rPr>
-              <a:t>(1)</a:t>
-            </a:r>
-            <a:endParaRPr lang="en-US" sz="1000" dirty="0"/>
-          </a:p>
-        </p:txBody>
-      </p:sp>
-      <p:sp>
-        <p:nvSpPr>
-          <p:cNvPr id="23" name="Text 21"/>
-          <p:cNvSpPr/>
-          <p:nvPr/>
-        </p:nvSpPr>
-        <p:spPr>
-          <a:xfrm>
-            <a:off x="1676400" y="1219200"/>
-            <a:ext cx="279400" cy="127000"/>
-          </a:xfrm>
-          <a:prstGeom prst="rect">
-            <a:avLst/>
-          </a:prstGeom>
-          <a:noFill/>
-          <a:ln/>
-        </p:spPr>
-        <p:txBody>
-          <a:bodyPr wrap="square" lIns="0" tIns="0" rIns="0" bIns="0" rtlCol="0" anchor="ctr"/>
-          <a:lstStyle/>
-          <a:p>
-            <a:pPr algn="ctr" indent="0" marL="0">
-              <a:buNone/>
-            </a:pPr>
-            <a:r>
-              <a:rPr lang="en-US" sz="1000" dirty="0">
-                <a:solidFill>
-                  <a:srgbClr val="000000"/>
-                </a:solidFill>
-                <a:latin typeface="Arial" pitchFamily="34" charset="0"/>
-                <a:ea typeface="Arial" pitchFamily="34" charset="-122"/>
-                <a:cs typeface="Arial" pitchFamily="34" charset="-120"/>
-              </a:rPr>
-              <a:t>(2)</a:t>
-            </a:r>
-            <a:endParaRPr lang="en-US" sz="1000" dirty="0"/>
-          </a:p>
-        </p:txBody>
-      </p:sp>
-      <p:sp>
-        <p:nvSpPr>
-          <p:cNvPr id="24" name="Text 22"/>
-          <p:cNvSpPr/>
-          <p:nvPr/>
-        </p:nvSpPr>
-        <p:spPr>
-          <a:xfrm>
-            <a:off x="1968500" y="1219200"/>
-            <a:ext cx="279400" cy="127000"/>
-          </a:xfrm>
-          <a:prstGeom prst="rect">
-            <a:avLst/>
-          </a:prstGeom>
-          <a:noFill/>
-          <a:ln/>
-        </p:spPr>
-        <p:txBody>
-          <a:bodyPr wrap="square" lIns="0" tIns="0" rIns="0" bIns="0" rtlCol="0" anchor="ctr"/>
-          <a:lstStyle/>
-          <a:p>
-            <a:pPr algn="ctr" indent="0" marL="0">
-              <a:buNone/>
-            </a:pPr>
-            <a:r>
-              <a:rPr lang="en-US" sz="1000" dirty="0">
-                <a:solidFill>
-                  <a:srgbClr val="000000"/>
-                </a:solidFill>
-                <a:latin typeface="Arial" pitchFamily="34" charset="0"/>
-                <a:ea typeface="Arial" pitchFamily="34" charset="-122"/>
-                <a:cs typeface="Arial" pitchFamily="34" charset="-120"/>
-              </a:rPr>
-              <a:t>(4)</a:t>
-            </a:r>
-            <a:endParaRPr lang="en-US" sz="1000" dirty="0"/>
-          </a:p>
-        </p:txBody>
-      </p:sp>
-      <p:sp>
-        <p:nvSpPr>
-          <p:cNvPr id="25" name="Text 23"/>
-          <p:cNvSpPr/>
-          <p:nvPr/>
-        </p:nvSpPr>
-        <p:spPr>
-          <a:xfrm>
-            <a:off x="2260600" y="1219200"/>
-            <a:ext cx="279400" cy="127000"/>
-          </a:xfrm>
-          <a:prstGeom prst="rect">
-            <a:avLst/>
-          </a:prstGeom>
-          <a:noFill/>
-          <a:ln/>
-        </p:spPr>
-        <p:txBody>
-          <a:bodyPr wrap="square" lIns="0" tIns="0" rIns="0" bIns="0" rtlCol="0" anchor="ctr"/>
-          <a:lstStyle/>
-          <a:p>
-            <a:pPr algn="ctr" indent="0" marL="0">
-              <a:buNone/>
-            </a:pPr>
-            <a:r>
-              <a:rPr lang="en-US" sz="1000" dirty="0">
-                <a:solidFill>
-                  <a:srgbClr val="000000"/>
-                </a:solidFill>
-                <a:latin typeface="Arial" pitchFamily="34" charset="0"/>
-                <a:ea typeface="Arial" pitchFamily="34" charset="-122"/>
-                <a:cs typeface="Arial" pitchFamily="34" charset="-120"/>
-              </a:rPr>
-              <a:t>(5)</a:t>
-            </a:r>
-            <a:endParaRPr lang="en-US" sz="1000" dirty="0"/>
-          </a:p>
-        </p:txBody>
-      </p:sp>
-      <p:sp>
-        <p:nvSpPr>
-          <p:cNvPr id="26" name="Text 24"/>
-          <p:cNvSpPr/>
-          <p:nvPr/>
-        </p:nvSpPr>
-        <p:spPr>
-          <a:xfrm>
-            <a:off x="2578100" y="1219200"/>
-            <a:ext cx="279400" cy="127000"/>
-          </a:xfrm>
-          <a:prstGeom prst="rect">
-            <a:avLst/>
-          </a:prstGeom>
-          <a:noFill/>
-          <a:ln/>
-        </p:spPr>
-        <p:txBody>
-          <a:bodyPr wrap="square" lIns="0" tIns="0" rIns="0" bIns="0" rtlCol="0" anchor="ctr"/>
-          <a:lstStyle/>
-          <a:p>
-            <a:pPr algn="ctr" indent="0" marL="0">
-              <a:buNone/>
-            </a:pPr>
-            <a:r>
-              <a:rPr lang="en-US" sz="1000" dirty="0">
-                <a:solidFill>
-                  <a:srgbClr val="000000"/>
-                </a:solidFill>
-                <a:latin typeface="Arial" pitchFamily="34" charset="0"/>
-                <a:ea typeface="Arial" pitchFamily="34" charset="-122"/>
-                <a:cs typeface="Arial" pitchFamily="34" charset="-120"/>
-              </a:rPr>
-              <a:t>(6)</a:t>
-            </a:r>
-            <a:endParaRPr lang="en-US" sz="1000" dirty="0"/>
+            <a:endParaRPr lang="en-US" sz="1100" dirty="0"/>
           </a:p>
         </p:txBody>
       </p:sp>
@@ -1847,24 +1763,24 @@
         </p:nvSpPr>
         <p:spPr>
           <a:xfrm>
-            <a:off x="1117600" y="1422400"/>
-            <a:ext cx="279400" cy="165100"/>
-          </a:xfrm>
-          <a:prstGeom prst="rect">
-            <a:avLst/>
-          </a:prstGeom>
-          <a:noFill/>
-          <a:ln/>
-        </p:spPr>
-        <p:txBody>
-          <a:bodyPr wrap="square" lIns="0" tIns="0" rIns="0" bIns="0" rtlCol="0" anchor="ctr"/>
-          <a:lstStyle/>
-          <a:p>
-            <a:pPr algn="ctr" indent="0" marL="0">
-              <a:buNone/>
-            </a:pPr>
-            <a:r>
-              <a:rPr lang="en-US" sz="1000" b="1" dirty="0">
+            <a:off x="1079500" y="1435100"/>
+            <a:ext cx="284480" cy="152400"/>
+          </a:xfrm>
+          <a:prstGeom prst="rect">
+            <a:avLst/>
+          </a:prstGeom>
+          <a:noFill/>
+          <a:ln/>
+        </p:spPr>
+        <p:txBody>
+          <a:bodyPr wrap="square" lIns="0" tIns="0" rIns="0" bIns="0" rtlCol="0" anchor="ctr"/>
+          <a:lstStyle/>
+          <a:p>
+            <a:pPr algn="ctr" indent="0" marL="0">
+              <a:buNone/>
+            </a:pPr>
+            <a:r>
+              <a:rPr lang="en-US" sz="1100" b="1" i="1" dirty="0">
                 <a:solidFill>
                   <a:srgbClr val="FF0000"/>
                 </a:solidFill>
@@ -1872,13 +1788,38 @@
                 <a:ea typeface="Arial" pitchFamily="34" charset="-122"/>
                 <a:cs typeface="Arial" pitchFamily="34" charset="-120"/>
               </a:rPr>
-              <a:t>C</a:t>
-            </a:r>
-            <a:pPr algn="ctr" indent="0" marL="0">
-              <a:buNone/>
-            </a:pPr>
-            <a:r>
-              <a:rPr lang="en-US" sz="800" b="1" baseline="-40000" dirty="0">
+              <a:t>C₁</a:t>
+            </a:r>
+            <a:endParaRPr lang="en-US" sz="1100" dirty="0"/>
+          </a:p>
+        </p:txBody>
+      </p:sp>
+      <p:sp>
+        <p:nvSpPr>
+          <p:cNvPr id="28" name="Text 26"/>
+          <p:cNvSpPr/>
+          <p:nvPr/>
+        </p:nvSpPr>
+        <p:spPr>
+          <a:xfrm>
+            <a:off x="1363980" y="1435100"/>
+            <a:ext cx="284480" cy="152400"/>
+          </a:xfrm>
+          <a:prstGeom prst="rect">
+            <a:avLst/>
+          </a:prstGeom>
+          <a:noFill/>
+          <a:ln/>
+        </p:spPr>
+        <p:txBody>
+          <a:bodyPr wrap="square" lIns="0" tIns="0" rIns="0" bIns="0" rtlCol="0" anchor="ctr"/>
+          <a:lstStyle/>
+          <a:p>
+            <a:pPr algn="ctr" indent="0" marL="0">
+              <a:buNone/>
+            </a:pPr>
+            <a:r>
+              <a:rPr lang="en-US" sz="1100" b="1" i="1" dirty="0">
                 <a:solidFill>
                   <a:srgbClr val="FF0000"/>
                 </a:solidFill>
@@ -1886,38 +1827,38 @@
                 <a:ea typeface="Arial" pitchFamily="34" charset="-122"/>
                 <a:cs typeface="Arial" pitchFamily="34" charset="-120"/>
               </a:rPr>
-              <a:t>1</a:t>
-            </a:r>
-            <a:endParaRPr lang="en-US" sz="1000" dirty="0"/>
-          </a:p>
-        </p:txBody>
-      </p:sp>
-      <p:sp>
-        <p:nvSpPr>
-          <p:cNvPr id="28" name="Text 26"/>
-          <p:cNvSpPr/>
-          <p:nvPr/>
-        </p:nvSpPr>
-        <p:spPr>
-          <a:xfrm>
-            <a:off x="1397000" y="1422400"/>
-            <a:ext cx="279400" cy="165100"/>
-          </a:xfrm>
-          <a:prstGeom prst="rect">
-            <a:avLst/>
-          </a:prstGeom>
-          <a:noFill/>
-          <a:ln/>
-        </p:spPr>
-        <p:txBody>
-          <a:bodyPr wrap="square" lIns="0" tIns="0" rIns="0" bIns="0" rtlCol="0" anchor="ctr"/>
-          <a:lstStyle/>
-          <a:p>
-            <a:pPr algn="ctr" indent="0" marL="0">
-              <a:buNone/>
-            </a:pPr>
-            <a:r>
-              <a:rPr lang="en-US" sz="1000" b="1" dirty="0">
+              <a:t>C₁</a:t>
+            </a:r>
+            <a:endParaRPr lang="en-US" sz="1100" dirty="0"/>
+          </a:p>
+        </p:txBody>
+      </p:sp>
+      <p:sp>
+        <p:nvSpPr>
+          <p:cNvPr id="29" name="Text 27"/>
+          <p:cNvSpPr/>
+          <p:nvPr/>
+        </p:nvSpPr>
+        <p:spPr>
+          <a:xfrm>
+            <a:off x="1648460" y="1435100"/>
+            <a:ext cx="284480" cy="152400"/>
+          </a:xfrm>
+          <a:prstGeom prst="rect">
+            <a:avLst/>
+          </a:prstGeom>
+          <a:noFill/>
+          <a:ln/>
+        </p:spPr>
+        <p:txBody>
+          <a:bodyPr wrap="square" lIns="0" tIns="0" rIns="0" bIns="0" rtlCol="0" anchor="ctr"/>
+          <a:lstStyle/>
+          <a:p>
+            <a:pPr algn="ctr" indent="0" marL="0">
+              <a:buNone/>
+            </a:pPr>
+            <a:r>
+              <a:rPr lang="en-US" sz="1100" b="1" i="1" dirty="0">
                 <a:solidFill>
                   <a:srgbClr val="FF0000"/>
                 </a:solidFill>
@@ -1925,76 +1866,9 @@
                 <a:ea typeface="Arial" pitchFamily="34" charset="-122"/>
                 <a:cs typeface="Arial" pitchFamily="34" charset="-120"/>
               </a:rPr>
-              <a:t>C</a:t>
-            </a:r>
-            <a:pPr algn="ctr" indent="0" marL="0">
-              <a:buNone/>
-            </a:pPr>
-            <a:r>
-              <a:rPr lang="en-US" sz="800" b="1" baseline="-40000" dirty="0">
-                <a:solidFill>
-                  <a:srgbClr val="FF0000"/>
-                </a:solidFill>
-                <a:latin typeface="Arial" pitchFamily="34" charset="0"/>
-                <a:ea typeface="Arial" pitchFamily="34" charset="-122"/>
-                <a:cs typeface="Arial" pitchFamily="34" charset="-120"/>
-              </a:rPr>
-              <a:t>1</a:t>
-            </a:r>
-            <a:endParaRPr lang="en-US" sz="1000" dirty="0"/>
-          </a:p>
-        </p:txBody>
-      </p:sp>
-      <p:sp>
-        <p:nvSpPr>
-          <p:cNvPr id="29" name="Text 27"/>
-          <p:cNvSpPr/>
-          <p:nvPr/>
-        </p:nvSpPr>
-        <p:spPr>
-          <a:xfrm>
-            <a:off x="1676400" y="1422400"/>
-            <a:ext cx="279400" cy="165100"/>
-          </a:xfrm>
-          <a:prstGeom prst="rect">
-            <a:avLst/>
-          </a:prstGeom>
-          <a:noFill/>
-          <a:ln/>
-        </p:spPr>
-        <p:txBody>
-          <a:bodyPr wrap="square" lIns="0" tIns="0" rIns="0" bIns="0" rtlCol="0" anchor="ctr"/>
-          <a:lstStyle/>
-          <a:p>
-            <a:pPr algn="ctr" indent="0" marL="0">
-              <a:buNone/>
-            </a:pPr>
-            <a:r>
-              <a:rPr lang="en-US" sz="1000" b="1" dirty="0">
-                <a:solidFill>
-                  <a:srgbClr val="FF0000"/>
-                </a:solidFill>
-                <a:latin typeface="Arial" pitchFamily="34" charset="0"/>
-                <a:ea typeface="Arial" pitchFamily="34" charset="-122"/>
-                <a:cs typeface="Arial" pitchFamily="34" charset="-120"/>
-              </a:rPr>
-              <a:t>C</a:t>
-            </a:r>
-            <a:pPr algn="ctr" indent="0" marL="0">
-              <a:buNone/>
-            </a:pPr>
-            <a:r>
-              <a:rPr lang="en-US" sz="800" b="1" baseline="-40000" dirty="0">
-                <a:solidFill>
-                  <a:srgbClr val="FF0000"/>
-                </a:solidFill>
-                <a:latin typeface="Arial" pitchFamily="34" charset="0"/>
-                <a:ea typeface="Arial" pitchFamily="34" charset="-122"/>
-                <a:cs typeface="Arial" pitchFamily="34" charset="-120"/>
-              </a:rPr>
-              <a:t>1</a:t>
-            </a:r>
-            <a:endParaRPr lang="en-US" sz="1000" dirty="0"/>
+              <a:t>C₁</a:t>
+            </a:r>
+            <a:endParaRPr lang="en-US" sz="1100" dirty="0"/>
           </a:p>
         </p:txBody>
       </p:sp>
@@ -2006,48 +1880,34 @@
         </p:nvSpPr>
         <p:spPr>
           <a:xfrm>
-            <a:off x="1968500" y="1422400"/>
-            <a:ext cx="279400" cy="165100"/>
-          </a:xfrm>
-          <a:prstGeom prst="rect">
-            <a:avLst/>
-          </a:prstGeom>
-          <a:noFill/>
-          <a:ln/>
-        </p:spPr>
-        <p:txBody>
-          <a:bodyPr wrap="square" lIns="0" tIns="0" rIns="0" bIns="0" rtlCol="0" anchor="ctr"/>
-          <a:lstStyle/>
-          <a:p>
-            <a:pPr algn="ctr" indent="0" marL="0">
-              <a:buNone/>
-            </a:pPr>
-            <a:r>
-              <a:rPr lang="en-US" sz="1000" b="1" dirty="0">
-                <a:solidFill>
-                  <a:srgbClr val="0000FF"/>
-                </a:solidFill>
-                <a:latin typeface="Arial" pitchFamily="34" charset="0"/>
-                <a:ea typeface="Arial" pitchFamily="34" charset="-122"/>
-                <a:cs typeface="Arial" pitchFamily="34" charset="-120"/>
-              </a:rPr>
-              <a:t>C</a:t>
-            </a:r>
-            <a:pPr algn="ctr" indent="0" marL="0">
-              <a:buNone/>
-            </a:pPr>
-            <a:r>
-              <a:rPr lang="en-US" sz="800" b="1" baseline="-40000" dirty="0">
-                <a:solidFill>
-                  <a:srgbClr val="0000FF"/>
-                </a:solidFill>
-                <a:latin typeface="Arial" pitchFamily="34" charset="0"/>
-                <a:ea typeface="Arial" pitchFamily="34" charset="-122"/>
-                <a:cs typeface="Arial" pitchFamily="34" charset="-120"/>
-              </a:rPr>
-              <a:t>2</a:t>
-            </a:r>
-            <a:endParaRPr lang="en-US" sz="1000" dirty="0"/>
+            <a:off x="1932940" y="1435100"/>
+            <a:ext cx="284480" cy="152400"/>
+          </a:xfrm>
+          <a:prstGeom prst="rect">
+            <a:avLst/>
+          </a:prstGeom>
+          <a:noFill/>
+          <a:ln/>
+        </p:spPr>
+        <p:txBody>
+          <a:bodyPr wrap="square" lIns="0" tIns="0" rIns="0" bIns="0" rtlCol="0" anchor="ctr"/>
+          <a:lstStyle/>
+          <a:p>
+            <a:pPr algn="ctr" indent="0" marL="0">
+              <a:buNone/>
+            </a:pPr>
+            <a:r>
+              <a:rPr lang="en-US" sz="1100" b="1" i="1" dirty="0">
+                <a:solidFill>
+                  <a:srgbClr val="211776"/>
+                </a:solidFill>
+                <a:latin typeface="Arial" pitchFamily="34" charset="0"/>
+                <a:ea typeface="Arial" pitchFamily="34" charset="-122"/>
+                <a:cs typeface="Arial" pitchFamily="34" charset="-120"/>
+              </a:rPr>
+              <a:t>C₂</a:t>
+            </a:r>
+            <a:endParaRPr lang="en-US" sz="1100" dirty="0"/>
           </a:p>
         </p:txBody>
       </p:sp>
@@ -2059,48 +1919,34 @@
         </p:nvSpPr>
         <p:spPr>
           <a:xfrm>
-            <a:off x="2260600" y="1422400"/>
-            <a:ext cx="279400" cy="165100"/>
-          </a:xfrm>
-          <a:prstGeom prst="rect">
-            <a:avLst/>
-          </a:prstGeom>
-          <a:noFill/>
-          <a:ln/>
-        </p:spPr>
-        <p:txBody>
-          <a:bodyPr wrap="square" lIns="0" tIns="0" rIns="0" bIns="0" rtlCol="0" anchor="ctr"/>
-          <a:lstStyle/>
-          <a:p>
-            <a:pPr algn="ctr" indent="0" marL="0">
-              <a:buNone/>
-            </a:pPr>
-            <a:r>
-              <a:rPr lang="en-US" sz="1000" b="1" dirty="0">
-                <a:solidFill>
-                  <a:srgbClr val="0000FF"/>
-                </a:solidFill>
-                <a:latin typeface="Arial" pitchFamily="34" charset="0"/>
-                <a:ea typeface="Arial" pitchFamily="34" charset="-122"/>
-                <a:cs typeface="Arial" pitchFamily="34" charset="-120"/>
-              </a:rPr>
-              <a:t>C</a:t>
-            </a:r>
-            <a:pPr algn="ctr" indent="0" marL="0">
-              <a:buNone/>
-            </a:pPr>
-            <a:r>
-              <a:rPr lang="en-US" sz="800" b="1" baseline="-40000" dirty="0">
-                <a:solidFill>
-                  <a:srgbClr val="0000FF"/>
-                </a:solidFill>
-                <a:latin typeface="Arial" pitchFamily="34" charset="0"/>
-                <a:ea typeface="Arial" pitchFamily="34" charset="-122"/>
-                <a:cs typeface="Arial" pitchFamily="34" charset="-120"/>
-              </a:rPr>
-              <a:t>2</a:t>
-            </a:r>
-            <a:endParaRPr lang="en-US" sz="1000" dirty="0"/>
+            <a:off x="2217420" y="1435100"/>
+            <a:ext cx="284480" cy="152400"/>
+          </a:xfrm>
+          <a:prstGeom prst="rect">
+            <a:avLst/>
+          </a:prstGeom>
+          <a:noFill/>
+          <a:ln/>
+        </p:spPr>
+        <p:txBody>
+          <a:bodyPr wrap="square" lIns="0" tIns="0" rIns="0" bIns="0" rtlCol="0" anchor="ctr"/>
+          <a:lstStyle/>
+          <a:p>
+            <a:pPr algn="ctr" indent="0" marL="0">
+              <a:buNone/>
+            </a:pPr>
+            <a:r>
+              <a:rPr lang="en-US" sz="1100" b="1" i="1" dirty="0">
+                <a:solidFill>
+                  <a:srgbClr val="211776"/>
+                </a:solidFill>
+                <a:latin typeface="Arial" pitchFamily="34" charset="0"/>
+                <a:ea typeface="Arial" pitchFamily="34" charset="-122"/>
+                <a:cs typeface="Arial" pitchFamily="34" charset="-120"/>
+              </a:rPr>
+              <a:t>C₂</a:t>
+            </a:r>
+            <a:endParaRPr lang="en-US" sz="1100" dirty="0"/>
           </a:p>
         </p:txBody>
       </p:sp>
@@ -2112,54 +1958,40 @@
         </p:nvSpPr>
         <p:spPr>
           <a:xfrm>
-            <a:off x="2578100" y="1422400"/>
-            <a:ext cx="279400" cy="165100"/>
-          </a:xfrm>
-          <a:prstGeom prst="rect">
-            <a:avLst/>
-          </a:prstGeom>
-          <a:noFill/>
-          <a:ln/>
-        </p:spPr>
-        <p:txBody>
-          <a:bodyPr wrap="square" lIns="0" tIns="0" rIns="0" bIns="0" rtlCol="0" anchor="ctr"/>
-          <a:lstStyle/>
-          <a:p>
-            <a:pPr algn="ctr" indent="0" marL="0">
-              <a:buNone/>
-            </a:pPr>
-            <a:r>
-              <a:rPr lang="en-US" sz="1000" b="1" dirty="0">
-                <a:solidFill>
-                  <a:srgbClr val="0000FF"/>
-                </a:solidFill>
-                <a:latin typeface="Arial" pitchFamily="34" charset="0"/>
-                <a:ea typeface="Arial" pitchFamily="34" charset="-122"/>
-                <a:cs typeface="Arial" pitchFamily="34" charset="-120"/>
-              </a:rPr>
-              <a:t>C</a:t>
-            </a:r>
-            <a:pPr algn="ctr" indent="0" marL="0">
-              <a:buNone/>
-            </a:pPr>
-            <a:r>
-              <a:rPr lang="en-US" sz="800" b="1" baseline="-40000" dirty="0">
-                <a:solidFill>
-                  <a:srgbClr val="0000FF"/>
-                </a:solidFill>
-                <a:latin typeface="Arial" pitchFamily="34" charset="0"/>
-                <a:ea typeface="Arial" pitchFamily="34" charset="-122"/>
-                <a:cs typeface="Arial" pitchFamily="34" charset="-120"/>
-              </a:rPr>
-              <a:t>2</a:t>
-            </a:r>
-            <a:endParaRPr lang="en-US" sz="1000" dirty="0"/>
+            <a:off x="2501900" y="1435100"/>
+            <a:ext cx="284480" cy="152400"/>
+          </a:xfrm>
+          <a:prstGeom prst="rect">
+            <a:avLst/>
+          </a:prstGeom>
+          <a:noFill/>
+          <a:ln/>
+        </p:spPr>
+        <p:txBody>
+          <a:bodyPr wrap="square" lIns="0" tIns="0" rIns="0" bIns="0" rtlCol="0" anchor="ctr"/>
+          <a:lstStyle/>
+          <a:p>
+            <a:pPr algn="ctr" indent="0" marL="0">
+              <a:buNone/>
+            </a:pPr>
+            <a:r>
+              <a:rPr lang="en-US" sz="1100" b="1" i="1" dirty="0">
+                <a:solidFill>
+                  <a:srgbClr val="211776"/>
+                </a:solidFill>
+                <a:latin typeface="Arial" pitchFamily="34" charset="0"/>
+                <a:ea typeface="Arial" pitchFamily="34" charset="-122"/>
+                <a:cs typeface="Arial" pitchFamily="34" charset="-120"/>
+              </a:rPr>
+              <a:t>C₂</a:t>
+            </a:r>
+            <a:endParaRPr lang="en-US" sz="1100" dirty="0"/>
           </a:p>
         </p:txBody>
       </p:sp>
       <p:pic>
         <p:nvPicPr>
-          <p:cNvPr id="33" name="Image 0" descr="/home/ahmed/Projects/ai_llm_slides/videos/machine-learning/03_ridger_regression_gradient_descent/recreated_pptx/build/assets/eq_050_initialW.png">    </p:cNvPr>
+          <p:cNvPr id="33" name="Image 0" descr="/home/ahmed/Projects/ai_llm_slides/videos/machine-learning/03_ridger_regression_gradient_descent/recreated_pptx/build/assets/parens049/paren_top2_lp.png">    </p:cNvPr>
           <p:cNvPicPr>
             <a:picLocks noChangeAspect="1"/>
           </p:cNvPicPr>
@@ -2173,148 +2005,17 @@
         </p:blipFill>
         <p:spPr>
           <a:xfrm>
-            <a:off x="3378200" y="800100"/>
-            <a:ext cx="1356357" cy="289563"/>
+            <a:off x="1124585" y="971804"/>
+            <a:ext cx="44196" cy="393192"/>
           </a:xfrm>
           <a:prstGeom prst="rect">
             <a:avLst/>
           </a:prstGeom>
         </p:spPr>
       </p:pic>
-      <p:sp>
-        <p:nvSpPr>
-          <p:cNvPr id="34" name="Text 31"/>
-          <p:cNvSpPr/>
-          <p:nvPr/>
-        </p:nvSpPr>
-        <p:spPr>
-          <a:xfrm>
-            <a:off x="5397500" y="749300"/>
-            <a:ext cx="1371600" cy="190500"/>
-          </a:xfrm>
-          <a:prstGeom prst="rect">
-            <a:avLst/>
-          </a:prstGeom>
-          <a:noFill/>
-          <a:ln/>
-        </p:spPr>
-        <p:txBody>
-          <a:bodyPr wrap="square" lIns="0" tIns="0" rIns="0" bIns="0" rtlCol="0" anchor="ctr"/>
-          <a:lstStyle/>
-          <a:p>
-            <a:pPr algn="l" indent="0" marL="0">
-              <a:buNone/>
-            </a:pPr>
-            <a:r>
-              <a:rPr lang="en-US" sz="1100" b="1" dirty="0">
-                <a:solidFill>
-                  <a:srgbClr val="92211B"/>
-                </a:solidFill>
-                <a:latin typeface="Arial" pitchFamily="34" charset="0"/>
-                <a:ea typeface="Arial" pitchFamily="34" charset="-122"/>
-                <a:cs typeface="Arial" pitchFamily="34" charset="-120"/>
-              </a:rPr>
-              <a:t>REPEAT using Step</a:t>
-            </a:r>
-            <a:endParaRPr lang="en-US" sz="1100" dirty="0"/>
-          </a:p>
-        </p:txBody>
-      </p:sp>
-      <p:sp>
-        <p:nvSpPr>
-          <p:cNvPr id="35" name="Text 32"/>
-          <p:cNvSpPr/>
-          <p:nvPr/>
-        </p:nvSpPr>
-        <p:spPr>
-          <a:xfrm>
-            <a:off x="6883400" y="1066800"/>
-            <a:ext cx="1397000" cy="190500"/>
-          </a:xfrm>
-          <a:prstGeom prst="rect">
-            <a:avLst/>
-          </a:prstGeom>
-          <a:noFill/>
-          <a:ln/>
-        </p:spPr>
-        <p:txBody>
-          <a:bodyPr wrap="square" lIns="0" tIns="0" rIns="0" bIns="0" rtlCol="0" anchor="ctr"/>
-          <a:lstStyle/>
-          <a:p>
-            <a:pPr algn="l" indent="0" marL="0">
-              <a:buNone/>
-            </a:pPr>
-            <a:r>
-              <a:rPr lang="en-US" sz="1100" dirty="0">
-                <a:solidFill>
-                  <a:srgbClr val="000000"/>
-                </a:solidFill>
-                <a:latin typeface="Arial" pitchFamily="34" charset="0"/>
-                <a:ea typeface="Arial" pitchFamily="34" charset="-122"/>
-                <a:cs typeface="Arial" pitchFamily="34" charset="-120"/>
-              </a:rPr>
-              <a:t>Check classes of</a:t>
-            </a:r>
-            <a:endParaRPr lang="en-US" sz="1100" dirty="0"/>
-          </a:p>
-        </p:txBody>
-      </p:sp>
-      <p:sp>
-        <p:nvSpPr>
-          <p:cNvPr id="36" name="Text 33"/>
-          <p:cNvSpPr/>
-          <p:nvPr/>
-        </p:nvSpPr>
-        <p:spPr>
-          <a:xfrm>
-            <a:off x="8140700" y="939800"/>
-            <a:ext cx="203200" cy="152400"/>
-          </a:xfrm>
-          <a:prstGeom prst="rect">
-            <a:avLst/>
-          </a:prstGeom>
-          <a:noFill/>
-          <a:ln/>
-        </p:spPr>
-        <p:txBody>
-          <a:bodyPr wrap="square" lIns="0" tIns="0" rIns="0" bIns="0" rtlCol="0" anchor="ctr"/>
-          <a:lstStyle/>
-          <a:p>
-            <a:pPr algn="l" indent="0" marL="0">
-              <a:buNone/>
-            </a:pPr>
-            <a:r>
-              <a:rPr lang="en-US" sz="1200" i="1" dirty="0">
-                <a:solidFill>
-                  <a:srgbClr val="000000"/>
-                </a:solidFill>
-                <a:latin typeface="Arial" pitchFamily="34" charset="0"/>
-                <a:ea typeface="Arial" pitchFamily="34" charset="-122"/>
-                <a:cs typeface="Arial" pitchFamily="34" charset="-120"/>
-              </a:rPr>
-              <a:t>Z</a:t>
-            </a:r>
-            <a:pPr algn="l" indent="0" marL="0">
-              <a:buNone/>
-            </a:pPr>
-            <a:r>
-              <a:rPr lang="en-US" sz="900" i="1" baseline="-40000" dirty="0">
-                <a:solidFill>
-                  <a:srgbClr val="000000"/>
-                </a:solidFill>
-                <a:latin typeface="Arial" pitchFamily="34" charset="0"/>
-                <a:ea typeface="Arial" pitchFamily="34" charset="-122"/>
-                <a:cs typeface="Arial" pitchFamily="34" charset="-120"/>
-              </a:rPr>
-              <a:t>1</a:t>
-            </a:r>
-            <a:endParaRPr lang="en-US" sz="1200" dirty="0"/>
-          </a:p>
-        </p:txBody>
-      </p:sp>
       <p:pic>
         <p:nvPicPr>
-          <p:cNvPr id="37" name="Image 1" descr="/home/ahmed/Projects/ai_llm_slides/videos/machine-learning/03_ridger_regression_gradient_descent/recreated_pptx/build/assets/eq_050_Z1.png">    </p:cNvPr>
+          <p:cNvPr id="34" name="Image 1" descr="/home/ahmed/Projects/ai_llm_slides/videos/machine-learning/03_ridger_regression_gradient_descent/recreated_pptx/build/assets/parens049/paren_top2_rp.png">    </p:cNvPr>
           <p:cNvPicPr>
             <a:picLocks noChangeAspect="1"/>
           </p:cNvPicPr>
@@ -2328,70 +2029,17 @@
         </p:blipFill>
         <p:spPr>
           <a:xfrm>
-            <a:off x="8140700" y="1092200"/>
-            <a:ext cx="246888" cy="274320"/>
+            <a:off x="1278509" y="971804"/>
+            <a:ext cx="44196" cy="393192"/>
           </a:xfrm>
           <a:prstGeom prst="rect">
             <a:avLst/>
           </a:prstGeom>
         </p:spPr>
       </p:pic>
-      <p:sp>
-        <p:nvSpPr>
-          <p:cNvPr id="38" name="Text 34"/>
-          <p:cNvSpPr/>
-          <p:nvPr/>
-        </p:nvSpPr>
-        <p:spPr>
-          <a:xfrm>
-            <a:off x="8432800" y="939800"/>
-            <a:ext cx="203200" cy="152400"/>
-          </a:xfrm>
-          <a:prstGeom prst="rect">
-            <a:avLst/>
-          </a:prstGeom>
-          <a:noFill/>
-          <a:ln/>
-        </p:spPr>
-        <p:txBody>
-          <a:bodyPr wrap="square" lIns="0" tIns="0" rIns="0" bIns="0" rtlCol="0" anchor="ctr"/>
-          <a:lstStyle/>
-          <a:p>
-            <a:pPr algn="l" indent="0" marL="0">
-              <a:buNone/>
-            </a:pPr>
-            <a:r>
-              <a:rPr lang="en-US" sz="1200" i="1" dirty="0">
-                <a:solidFill>
-                  <a:srgbClr val="000000"/>
-                </a:solidFill>
-                <a:latin typeface="Arial" pitchFamily="34" charset="0"/>
-                <a:ea typeface="Arial" pitchFamily="34" charset="-122"/>
-                <a:cs typeface="Arial" pitchFamily="34" charset="-120"/>
-              </a:rPr>
-              <a:t>Z</a:t>
-            </a:r>
-            <a:pPr algn="l" indent="0" marL="0">
-              <a:buNone/>
-            </a:pPr>
-            <a:r>
-              <a:rPr lang="en-US" sz="900" i="1" baseline="-40000" dirty="0">
-                <a:solidFill>
-                  <a:srgbClr val="000000"/>
-                </a:solidFill>
-                <a:latin typeface="Arial" pitchFamily="34" charset="0"/>
-                <a:ea typeface="Arial" pitchFamily="34" charset="-122"/>
-                <a:cs typeface="Arial" pitchFamily="34" charset="-120"/>
-              </a:rPr>
-              <a:t>2</a:t>
-            </a:r>
-            <a:endParaRPr lang="en-US" sz="1200" dirty="0"/>
-          </a:p>
-        </p:txBody>
-      </p:sp>
       <p:pic>
         <p:nvPicPr>
-          <p:cNvPr id="39" name="Image 2" descr="/home/ahmed/Projects/ai_llm_slides/videos/machine-learning/03_ridger_regression_gradient_descent/recreated_pptx/build/assets/eq_050_Z2.png">    </p:cNvPr>
+          <p:cNvPr id="35" name="Image 2" descr="/home/ahmed/Projects/ai_llm_slides/videos/machine-learning/03_ridger_regression_gradient_descent/recreated_pptx/build/assets/parens049/paren_top2_lp.png">    </p:cNvPr>
           <p:cNvPicPr>
             <a:picLocks noChangeAspect="1"/>
           </p:cNvPicPr>
@@ -2405,70 +2053,17 @@
         </p:blipFill>
         <p:spPr>
           <a:xfrm>
-            <a:off x="8432800" y="1092200"/>
-            <a:ext cx="245361" cy="269748"/>
+            <a:off x="1396365" y="971804"/>
+            <a:ext cx="44196" cy="393192"/>
           </a:xfrm>
           <a:prstGeom prst="rect">
             <a:avLst/>
           </a:prstGeom>
         </p:spPr>
       </p:pic>
-      <p:sp>
-        <p:nvSpPr>
-          <p:cNvPr id="40" name="Text 35"/>
-          <p:cNvSpPr/>
-          <p:nvPr/>
-        </p:nvSpPr>
-        <p:spPr>
-          <a:xfrm>
-            <a:off x="8712200" y="939800"/>
-            <a:ext cx="203200" cy="152400"/>
-          </a:xfrm>
-          <a:prstGeom prst="rect">
-            <a:avLst/>
-          </a:prstGeom>
-          <a:noFill/>
-          <a:ln/>
-        </p:spPr>
-        <p:txBody>
-          <a:bodyPr wrap="square" lIns="0" tIns="0" rIns="0" bIns="0" rtlCol="0" anchor="ctr"/>
-          <a:lstStyle/>
-          <a:p>
-            <a:pPr algn="l" indent="0" marL="0">
-              <a:buNone/>
-            </a:pPr>
-            <a:r>
-              <a:rPr lang="en-US" sz="1200" i="1" dirty="0">
-                <a:solidFill>
-                  <a:srgbClr val="000000"/>
-                </a:solidFill>
-                <a:latin typeface="Arial" pitchFamily="34" charset="0"/>
-                <a:ea typeface="Arial" pitchFamily="34" charset="-122"/>
-                <a:cs typeface="Arial" pitchFamily="34" charset="-120"/>
-              </a:rPr>
-              <a:t>Z</a:t>
-            </a:r>
-            <a:pPr algn="l" indent="0" marL="0">
-              <a:buNone/>
-            </a:pPr>
-            <a:r>
-              <a:rPr lang="en-US" sz="900" i="1" baseline="-40000" dirty="0">
-                <a:solidFill>
-                  <a:srgbClr val="000000"/>
-                </a:solidFill>
-                <a:latin typeface="Arial" pitchFamily="34" charset="0"/>
-                <a:ea typeface="Arial" pitchFamily="34" charset="-122"/>
-                <a:cs typeface="Arial" pitchFamily="34" charset="-120"/>
-              </a:rPr>
-              <a:t>3</a:t>
-            </a:r>
-            <a:endParaRPr lang="en-US" sz="1200" dirty="0"/>
-          </a:p>
-        </p:txBody>
-      </p:sp>
       <p:pic>
         <p:nvPicPr>
-          <p:cNvPr id="41" name="Image 3" descr="/home/ahmed/Projects/ai_llm_slides/videos/machine-learning/03_ridger_regression_gradient_descent/recreated_pptx/build/assets/eq_050_Z3.png">    </p:cNvPr>
+          <p:cNvPr id="36" name="Image 3" descr="/home/ahmed/Projects/ai_llm_slides/videos/machine-learning/03_ridger_regression_gradient_descent/recreated_pptx/build/assets/parens049/paren_top2_rp.png">    </p:cNvPr>
           <p:cNvPicPr>
             <a:picLocks noChangeAspect="1"/>
           </p:cNvPicPr>
@@ -2482,6 +2077,778 @@
         </p:blipFill>
         <p:spPr>
           <a:xfrm>
+            <a:off x="1561719" y="971804"/>
+            <a:ext cx="44196" cy="393192"/>
+          </a:xfrm>
+          <a:prstGeom prst="rect">
+            <a:avLst/>
+          </a:prstGeom>
+        </p:spPr>
+      </p:pic>
+      <p:pic>
+        <p:nvPicPr>
+          <p:cNvPr id="37" name="Image 4" descr="/home/ahmed/Projects/ai_llm_slides/videos/machine-learning/03_ridger_regression_gradient_descent/recreated_pptx/build/assets/parens049/paren_top2_lp.png">    </p:cNvPr>
+          <p:cNvPicPr>
+            <a:picLocks noChangeAspect="1"/>
+          </p:cNvPicPr>
+          <p:nvPr/>
+        </p:nvPicPr>
+        <p:blipFill>
+          <a:blip r:embed="rId5"/>
+          <a:stretch>
+            <a:fillRect/>
+          </a:stretch>
+        </p:blipFill>
+        <p:spPr>
+          <a:xfrm>
+            <a:off x="1679194" y="971804"/>
+            <a:ext cx="44196" cy="393192"/>
+          </a:xfrm>
+          <a:prstGeom prst="rect">
+            <a:avLst/>
+          </a:prstGeom>
+        </p:spPr>
+      </p:pic>
+      <p:pic>
+        <p:nvPicPr>
+          <p:cNvPr id="38" name="Image 5" descr="/home/ahmed/Projects/ai_llm_slides/videos/machine-learning/03_ridger_regression_gradient_descent/recreated_pptx/build/assets/parens049/paren_top2_rp.png">    </p:cNvPr>
+          <p:cNvPicPr>
+            <a:picLocks noChangeAspect="1"/>
+          </p:cNvPicPr>
+          <p:nvPr/>
+        </p:nvPicPr>
+        <p:blipFill>
+          <a:blip r:embed="rId6"/>
+          <a:stretch>
+            <a:fillRect/>
+          </a:stretch>
+        </p:blipFill>
+        <p:spPr>
+          <a:xfrm>
+            <a:off x="1846199" y="971804"/>
+            <a:ext cx="44196" cy="393192"/>
+          </a:xfrm>
+          <a:prstGeom prst="rect">
+            <a:avLst/>
+          </a:prstGeom>
+        </p:spPr>
+      </p:pic>
+      <p:pic>
+        <p:nvPicPr>
+          <p:cNvPr id="39" name="Image 6" descr="/home/ahmed/Projects/ai_llm_slides/videos/machine-learning/03_ridger_regression_gradient_descent/recreated_pptx/build/assets/parens049/paren_top2_lp.png">    </p:cNvPr>
+          <p:cNvPicPr>
+            <a:picLocks noChangeAspect="1"/>
+          </p:cNvPicPr>
+          <p:nvPr/>
+        </p:nvPicPr>
+        <p:blipFill>
+          <a:blip r:embed="rId7"/>
+          <a:stretch>
+            <a:fillRect/>
+          </a:stretch>
+        </p:blipFill>
+        <p:spPr>
+          <a:xfrm>
+            <a:off x="1964182" y="971804"/>
+            <a:ext cx="44196" cy="393192"/>
+          </a:xfrm>
+          <a:prstGeom prst="rect">
+            <a:avLst/>
+          </a:prstGeom>
+        </p:spPr>
+      </p:pic>
+      <p:pic>
+        <p:nvPicPr>
+          <p:cNvPr id="40" name="Image 7" descr="/home/ahmed/Projects/ai_llm_slides/videos/machine-learning/03_ridger_regression_gradient_descent/recreated_pptx/build/assets/parens049/paren_top2_rp.png">    </p:cNvPr>
+          <p:cNvPicPr>
+            <a:picLocks noChangeAspect="1"/>
+          </p:cNvPicPr>
+          <p:nvPr/>
+        </p:nvPicPr>
+        <p:blipFill>
+          <a:blip r:embed="rId8"/>
+          <a:stretch>
+            <a:fillRect/>
+          </a:stretch>
+        </p:blipFill>
+        <p:spPr>
+          <a:xfrm>
+            <a:off x="2137664" y="971804"/>
+            <a:ext cx="44196" cy="393192"/>
+          </a:xfrm>
+          <a:prstGeom prst="rect">
+            <a:avLst/>
+          </a:prstGeom>
+        </p:spPr>
+      </p:pic>
+      <p:pic>
+        <p:nvPicPr>
+          <p:cNvPr id="41" name="Image 8" descr="/home/ahmed/Projects/ai_llm_slides/videos/machine-learning/03_ridger_regression_gradient_descent/recreated_pptx/build/assets/parens049/paren_top2_lp.png">    </p:cNvPr>
+          <p:cNvPicPr>
+            <a:picLocks noChangeAspect="1"/>
+          </p:cNvPicPr>
+          <p:nvPr/>
+        </p:nvPicPr>
+        <p:blipFill>
+          <a:blip r:embed="rId9"/>
+          <a:stretch>
+            <a:fillRect/>
+          </a:stretch>
+        </p:blipFill>
+        <p:spPr>
+          <a:xfrm>
+            <a:off x="2255647" y="971804"/>
+            <a:ext cx="44196" cy="393192"/>
+          </a:xfrm>
+          <a:prstGeom prst="rect">
+            <a:avLst/>
+          </a:prstGeom>
+        </p:spPr>
+      </p:pic>
+      <p:pic>
+        <p:nvPicPr>
+          <p:cNvPr id="42" name="Image 9" descr="/home/ahmed/Projects/ai_llm_slides/videos/machine-learning/03_ridger_regression_gradient_descent/recreated_pptx/build/assets/parens049/paren_top2_rp.png">    </p:cNvPr>
+          <p:cNvPicPr>
+            <a:picLocks noChangeAspect="1"/>
+          </p:cNvPicPr>
+          <p:nvPr/>
+        </p:nvPicPr>
+        <p:blipFill>
+          <a:blip r:embed="rId10"/>
+          <a:stretch>
+            <a:fillRect/>
+          </a:stretch>
+        </p:blipFill>
+        <p:spPr>
+          <a:xfrm>
+            <a:off x="2421890" y="971804"/>
+            <a:ext cx="44196" cy="393192"/>
+          </a:xfrm>
+          <a:prstGeom prst="rect">
+            <a:avLst/>
+          </a:prstGeom>
+        </p:spPr>
+      </p:pic>
+      <p:pic>
+        <p:nvPicPr>
+          <p:cNvPr id="43" name="Image 10" descr="/home/ahmed/Projects/ai_llm_slides/videos/machine-learning/03_ridger_regression_gradient_descent/recreated_pptx/build/assets/parens049/paren_top2_lp.png">    </p:cNvPr>
+          <p:cNvPicPr>
+            <a:picLocks noChangeAspect="1"/>
+          </p:cNvPicPr>
+          <p:nvPr/>
+        </p:nvPicPr>
+        <p:blipFill>
+          <a:blip r:embed="rId11"/>
+          <a:stretch>
+            <a:fillRect/>
+          </a:stretch>
+        </p:blipFill>
+        <p:spPr>
+          <a:xfrm>
+            <a:off x="2539746" y="971804"/>
+            <a:ext cx="44196" cy="393192"/>
+          </a:xfrm>
+          <a:prstGeom prst="rect">
+            <a:avLst/>
+          </a:prstGeom>
+        </p:spPr>
+      </p:pic>
+      <p:pic>
+        <p:nvPicPr>
+          <p:cNvPr id="44" name="Image 11" descr="/home/ahmed/Projects/ai_llm_slides/videos/machine-learning/03_ridger_regression_gradient_descent/recreated_pptx/build/assets/parens049/paren_top2_rp.png">    </p:cNvPr>
+          <p:cNvPicPr>
+            <a:picLocks noChangeAspect="1"/>
+          </p:cNvPicPr>
+          <p:nvPr/>
+        </p:nvPicPr>
+        <p:blipFill>
+          <a:blip r:embed="rId12"/>
+          <a:stretch>
+            <a:fillRect/>
+          </a:stretch>
+        </p:blipFill>
+        <p:spPr>
+          <a:xfrm>
+            <a:off x="2704973" y="971804"/>
+            <a:ext cx="44196" cy="393192"/>
+          </a:xfrm>
+          <a:prstGeom prst="rect">
+            <a:avLst/>
+          </a:prstGeom>
+        </p:spPr>
+      </p:pic>
+      <p:sp>
+        <p:nvSpPr>
+          <p:cNvPr id="45" name="Text 31"/>
+          <p:cNvSpPr/>
+          <p:nvPr/>
+        </p:nvSpPr>
+        <p:spPr>
+          <a:xfrm>
+            <a:off x="3327400" y="901700"/>
+            <a:ext cx="889000" cy="228600"/>
+          </a:xfrm>
+          <a:prstGeom prst="rect">
+            <a:avLst/>
+          </a:prstGeom>
+          <a:noFill/>
+          <a:ln/>
+        </p:spPr>
+        <p:txBody>
+          <a:bodyPr wrap="square" lIns="0" tIns="0" rIns="0" bIns="0" rtlCol="0" anchor="ctr"/>
+          <a:lstStyle/>
+          <a:p>
+            <a:pPr algn="l" indent="0" marL="0">
+              <a:buNone/>
+            </a:pPr>
+            <a:r>
+              <a:rPr lang="en-US" sz="1400" dirty="0">
+                <a:solidFill>
+                  <a:srgbClr val="000000"/>
+                </a:solidFill>
+                <a:latin typeface="Arial" pitchFamily="34" charset="0"/>
+                <a:ea typeface="Arial" pitchFamily="34" charset="-122"/>
+                <a:cs typeface="Arial" pitchFamily="34" charset="-120"/>
+              </a:rPr>
+              <a:t>Initial </a:t>
+            </a:r>
+            <a:pPr algn="l" indent="0" marL="0">
+              <a:buNone/>
+            </a:pPr>
+            <a:r>
+              <a:rPr lang="en-US" sz="1400" b="1" i="1" dirty="0">
+                <a:solidFill>
+                  <a:srgbClr val="000000"/>
+                </a:solidFill>
+                <a:latin typeface="Arial" pitchFamily="34" charset="0"/>
+                <a:ea typeface="Arial" pitchFamily="34" charset="-122"/>
+                <a:cs typeface="Arial" pitchFamily="34" charset="-120"/>
+              </a:rPr>
+              <a:t>W</a:t>
+            </a:r>
+            <a:pPr algn="l" indent="0" marL="0">
+              <a:buNone/>
+            </a:pPr>
+            <a:r>
+              <a:rPr lang="en-US" sz="1400" dirty="0">
+                <a:solidFill>
+                  <a:srgbClr val="000000"/>
+                </a:solidFill>
+                <a:latin typeface="Arial" pitchFamily="34" charset="0"/>
+                <a:ea typeface="Arial" pitchFamily="34" charset="-122"/>
+                <a:cs typeface="Arial" pitchFamily="34" charset="-120"/>
+              </a:rPr>
+              <a:t> =</a:t>
+            </a:r>
+            <a:endParaRPr lang="en-US" sz="1400" dirty="0"/>
+          </a:p>
+        </p:txBody>
+      </p:sp>
+      <p:pic>
+        <p:nvPicPr>
+          <p:cNvPr id="46" name="Image 12" descr="/home/ahmed/Projects/ai_llm_slides/videos/machine-learning/03_ridger_regression_gradient_descent/recreated_pptx/build/assets/parens042/paren_tall_lp.png">    </p:cNvPr>
+          <p:cNvPicPr>
+            <a:picLocks noChangeAspect="1"/>
+          </p:cNvPicPr>
+          <p:nvPr/>
+        </p:nvPicPr>
+        <p:blipFill>
+          <a:blip r:embed="rId13"/>
+          <a:stretch>
+            <a:fillRect/>
+          </a:stretch>
+        </p:blipFill>
+        <p:spPr>
+          <a:xfrm>
+            <a:off x="4160737" y="782823"/>
+            <a:ext cx="44240" cy="520204"/>
+          </a:xfrm>
+          <a:prstGeom prst="rect">
+            <a:avLst/>
+          </a:prstGeom>
+        </p:spPr>
+      </p:pic>
+      <p:pic>
+        <p:nvPicPr>
+          <p:cNvPr id="47" name="Image 13" descr="/home/ahmed/Projects/ai_llm_slides/videos/machine-learning/03_ridger_regression_gradient_descent/recreated_pptx/build/assets/parens042/paren_tall_rp.png">    </p:cNvPr>
+          <p:cNvPicPr>
+            <a:picLocks noChangeAspect="1"/>
+          </p:cNvPicPr>
+          <p:nvPr/>
+        </p:nvPicPr>
+        <p:blipFill>
+          <a:blip r:embed="rId14"/>
+          <a:stretch>
+            <a:fillRect/>
+          </a:stretch>
+        </p:blipFill>
+        <p:spPr>
+          <a:xfrm>
+            <a:off x="4483348" y="782823"/>
+            <a:ext cx="44240" cy="520204"/>
+          </a:xfrm>
+          <a:prstGeom prst="rect">
+            <a:avLst/>
+          </a:prstGeom>
+        </p:spPr>
+      </p:pic>
+      <p:sp>
+        <p:nvSpPr>
+          <p:cNvPr id="48" name="Text 32"/>
+          <p:cNvSpPr/>
+          <p:nvPr/>
+        </p:nvSpPr>
+        <p:spPr>
+          <a:xfrm>
+            <a:off x="4260850" y="749300"/>
+            <a:ext cx="177800" cy="177800"/>
+          </a:xfrm>
+          <a:prstGeom prst="rect">
+            <a:avLst/>
+          </a:prstGeom>
+          <a:noFill/>
+          <a:ln/>
+        </p:spPr>
+        <p:txBody>
+          <a:bodyPr wrap="square" lIns="0" tIns="0" rIns="0" bIns="0" rtlCol="0" anchor="ctr"/>
+          <a:lstStyle/>
+          <a:p>
+            <a:pPr algn="ctr" indent="0" marL="0">
+              <a:buNone/>
+            </a:pPr>
+            <a:r>
+              <a:rPr lang="en-US" sz="1100" dirty="0">
+                <a:solidFill>
+                  <a:srgbClr val="000000"/>
+                </a:solidFill>
+                <a:latin typeface="Arial" pitchFamily="34" charset="0"/>
+                <a:ea typeface="Arial" pitchFamily="34" charset="-122"/>
+                <a:cs typeface="Arial" pitchFamily="34" charset="-120"/>
+              </a:rPr>
+              <a:t>4</a:t>
+            </a:r>
+            <a:endParaRPr lang="en-US" sz="1100" dirty="0"/>
+          </a:p>
+        </p:txBody>
+      </p:sp>
+      <p:sp>
+        <p:nvSpPr>
+          <p:cNvPr id="49" name="Text 33"/>
+          <p:cNvSpPr/>
+          <p:nvPr/>
+        </p:nvSpPr>
+        <p:spPr>
+          <a:xfrm>
+            <a:off x="4235450" y="952500"/>
+            <a:ext cx="228600" cy="177800"/>
+          </a:xfrm>
+          <a:prstGeom prst="rect">
+            <a:avLst/>
+          </a:prstGeom>
+          <a:noFill/>
+          <a:ln/>
+        </p:spPr>
+        <p:txBody>
+          <a:bodyPr wrap="square" lIns="0" tIns="0" rIns="0" bIns="0" rtlCol="0" anchor="ctr"/>
+          <a:lstStyle/>
+          <a:p>
+            <a:pPr algn="ctr" indent="0" marL="0">
+              <a:buNone/>
+            </a:pPr>
+            <a:r>
+              <a:rPr lang="en-US" sz="1100" dirty="0">
+                <a:solidFill>
+                  <a:srgbClr val="000000"/>
+                </a:solidFill>
+                <a:latin typeface="Arial" pitchFamily="34" charset="0"/>
+                <a:ea typeface="Arial" pitchFamily="34" charset="-122"/>
+                <a:cs typeface="Arial" pitchFamily="34" charset="-120"/>
+              </a:rPr>
+              <a:t>-2</a:t>
+            </a:r>
+            <a:endParaRPr lang="en-US" sz="1100" dirty="0"/>
+          </a:p>
+        </p:txBody>
+      </p:sp>
+      <p:sp>
+        <p:nvSpPr>
+          <p:cNvPr id="50" name="Text 34"/>
+          <p:cNvSpPr/>
+          <p:nvPr/>
+        </p:nvSpPr>
+        <p:spPr>
+          <a:xfrm>
+            <a:off x="4235450" y="1149350"/>
+            <a:ext cx="228600" cy="177800"/>
+          </a:xfrm>
+          <a:prstGeom prst="rect">
+            <a:avLst/>
+          </a:prstGeom>
+          <a:noFill/>
+          <a:ln/>
+        </p:spPr>
+        <p:txBody>
+          <a:bodyPr wrap="square" lIns="0" tIns="0" rIns="0" bIns="0" rtlCol="0" anchor="ctr"/>
+          <a:lstStyle/>
+          <a:p>
+            <a:pPr algn="ctr" indent="0" marL="0">
+              <a:buNone/>
+            </a:pPr>
+            <a:r>
+              <a:rPr lang="en-US" sz="1100" dirty="0">
+                <a:solidFill>
+                  <a:srgbClr val="000000"/>
+                </a:solidFill>
+                <a:latin typeface="Arial" pitchFamily="34" charset="0"/>
+                <a:ea typeface="Arial" pitchFamily="34" charset="-122"/>
+                <a:cs typeface="Arial" pitchFamily="34" charset="-120"/>
+              </a:rPr>
+              <a:t>-2</a:t>
+            </a:r>
+            <a:endParaRPr lang="en-US" sz="1100" dirty="0"/>
+          </a:p>
+        </p:txBody>
+      </p:sp>
+      <p:sp>
+        <p:nvSpPr>
+          <p:cNvPr id="51" name="Text 35"/>
+          <p:cNvSpPr/>
+          <p:nvPr/>
+        </p:nvSpPr>
+        <p:spPr>
+          <a:xfrm>
+            <a:off x="4635500" y="711200"/>
+            <a:ext cx="812800" cy="228600"/>
+          </a:xfrm>
+          <a:prstGeom prst="rect">
+            <a:avLst/>
+          </a:prstGeom>
+          <a:noFill/>
+          <a:ln/>
+        </p:spPr>
+        <p:txBody>
+          <a:bodyPr wrap="square" lIns="0" tIns="0" rIns="0" bIns="0" rtlCol="0" anchor="ctr"/>
+          <a:lstStyle/>
+          <a:p>
+            <a:pPr algn="l" indent="0" marL="0">
+              <a:buNone/>
+            </a:pPr>
+            <a:r>
+              <a:rPr lang="en-US" sz="1400" i="1" u="sng" dirty="0">
+                <a:solidFill>
+                  <a:srgbClr val="000000"/>
+                </a:solidFill>
+                <a:latin typeface="Arial" pitchFamily="34" charset="0"/>
+                <a:ea typeface="Arial" pitchFamily="34" charset="-122"/>
+                <a:cs typeface="Arial" pitchFamily="34" charset="-120"/>
+              </a:rPr>
+              <a:t>REPEAT</a:t>
+            </a:r>
+            <a:endParaRPr lang="en-US" sz="1400" dirty="0"/>
+          </a:p>
+        </p:txBody>
+      </p:sp>
+      <p:sp>
+        <p:nvSpPr>
+          <p:cNvPr id="52" name="Text 36"/>
+          <p:cNvSpPr/>
+          <p:nvPr/>
+        </p:nvSpPr>
+        <p:spPr>
+          <a:xfrm>
+            <a:off x="5391150" y="723900"/>
+            <a:ext cx="1422400" cy="215900"/>
+          </a:xfrm>
+          <a:prstGeom prst="rect">
+            <a:avLst/>
+          </a:prstGeom>
+          <a:noFill/>
+          <a:ln/>
+        </p:spPr>
+        <p:txBody>
+          <a:bodyPr wrap="square" lIns="0" tIns="0" rIns="0" bIns="0" rtlCol="0" anchor="ctr"/>
+          <a:lstStyle/>
+          <a:p>
+            <a:pPr algn="l" indent="0" marL="0">
+              <a:buNone/>
+            </a:pPr>
+            <a:r>
+              <a:rPr lang="en-US" sz="1400" b="1" i="1" dirty="0">
+                <a:solidFill>
+                  <a:srgbClr val="92211B"/>
+                </a:solidFill>
+                <a:latin typeface="Arial" pitchFamily="34" charset="0"/>
+                <a:ea typeface="Arial" pitchFamily="34" charset="-122"/>
+                <a:cs typeface="Arial" pitchFamily="34" charset="-120"/>
+              </a:rPr>
+              <a:t>using Step η = 1</a:t>
+            </a:r>
+            <a:endParaRPr lang="en-US" sz="1400" dirty="0"/>
+          </a:p>
+        </p:txBody>
+      </p:sp>
+      <p:sp>
+        <p:nvSpPr>
+          <p:cNvPr id="53" name="Text 37"/>
+          <p:cNvSpPr/>
+          <p:nvPr/>
+        </p:nvSpPr>
+        <p:spPr>
+          <a:xfrm>
+            <a:off x="6883400" y="1066800"/>
+            <a:ext cx="1397000" cy="190500"/>
+          </a:xfrm>
+          <a:prstGeom prst="rect">
+            <a:avLst/>
+          </a:prstGeom>
+          <a:noFill/>
+          <a:ln/>
+        </p:spPr>
+        <p:txBody>
+          <a:bodyPr wrap="square" lIns="0" tIns="0" rIns="0" bIns="0" rtlCol="0" anchor="ctr"/>
+          <a:lstStyle/>
+          <a:p>
+            <a:pPr algn="l" indent="0" marL="0">
+              <a:buNone/>
+            </a:pPr>
+            <a:r>
+              <a:rPr lang="en-US" sz="1100" dirty="0">
+                <a:solidFill>
+                  <a:srgbClr val="000000"/>
+                </a:solidFill>
+                <a:latin typeface="Arial" pitchFamily="34" charset="0"/>
+                <a:ea typeface="Arial" pitchFamily="34" charset="-122"/>
+                <a:cs typeface="Arial" pitchFamily="34" charset="-120"/>
+              </a:rPr>
+              <a:t>Check classes of</a:t>
+            </a:r>
+            <a:endParaRPr lang="en-US" sz="1100" dirty="0"/>
+          </a:p>
+        </p:txBody>
+      </p:sp>
+      <p:sp>
+        <p:nvSpPr>
+          <p:cNvPr id="54" name="Text 38"/>
+          <p:cNvSpPr/>
+          <p:nvPr/>
+        </p:nvSpPr>
+        <p:spPr>
+          <a:xfrm>
+            <a:off x="8140700" y="939800"/>
+            <a:ext cx="203200" cy="152400"/>
+          </a:xfrm>
+          <a:prstGeom prst="rect">
+            <a:avLst/>
+          </a:prstGeom>
+          <a:noFill/>
+          <a:ln/>
+        </p:spPr>
+        <p:txBody>
+          <a:bodyPr wrap="square" lIns="0" tIns="0" rIns="0" bIns="0" rtlCol="0" anchor="ctr"/>
+          <a:lstStyle/>
+          <a:p>
+            <a:pPr algn="l" indent="0" marL="0">
+              <a:buNone/>
+            </a:pPr>
+            <a:r>
+              <a:rPr lang="en-US" sz="1200" i="1" dirty="0">
+                <a:solidFill>
+                  <a:srgbClr val="000000"/>
+                </a:solidFill>
+                <a:latin typeface="Arial" pitchFamily="34" charset="0"/>
+                <a:ea typeface="Arial" pitchFamily="34" charset="-122"/>
+                <a:cs typeface="Arial" pitchFamily="34" charset="-120"/>
+              </a:rPr>
+              <a:t>Z</a:t>
+            </a:r>
+            <a:pPr algn="l" indent="0" marL="0">
+              <a:buNone/>
+            </a:pPr>
+            <a:r>
+              <a:rPr lang="en-US" sz="900" i="1" baseline="-40000" dirty="0">
+                <a:solidFill>
+                  <a:srgbClr val="000000"/>
+                </a:solidFill>
+                <a:latin typeface="Arial" pitchFamily="34" charset="0"/>
+                <a:ea typeface="Arial" pitchFamily="34" charset="-122"/>
+                <a:cs typeface="Arial" pitchFamily="34" charset="-120"/>
+              </a:rPr>
+              <a:t>1</a:t>
+            </a:r>
+            <a:endParaRPr lang="en-US" sz="1200" dirty="0"/>
+          </a:p>
+        </p:txBody>
+      </p:sp>
+      <p:pic>
+        <p:nvPicPr>
+          <p:cNvPr id="55" name="Image 14" descr="/home/ahmed/Projects/ai_llm_slides/videos/machine-learning/03_ridger_regression_gradient_descent/recreated_pptx/build/assets/eq_050_Z1.png">    </p:cNvPr>
+          <p:cNvPicPr>
+            <a:picLocks noChangeAspect="1"/>
+          </p:cNvPicPr>
+          <p:nvPr/>
+        </p:nvPicPr>
+        <p:blipFill>
+          <a:blip r:embed="rId15"/>
+          <a:stretch>
+            <a:fillRect/>
+          </a:stretch>
+        </p:blipFill>
+        <p:spPr>
+          <a:xfrm>
+            <a:off x="8140700" y="1092200"/>
+            <a:ext cx="246888" cy="274320"/>
+          </a:xfrm>
+          <a:prstGeom prst="rect">
+            <a:avLst/>
+          </a:prstGeom>
+        </p:spPr>
+      </p:pic>
+      <p:sp>
+        <p:nvSpPr>
+          <p:cNvPr id="56" name="Text 39"/>
+          <p:cNvSpPr/>
+          <p:nvPr/>
+        </p:nvSpPr>
+        <p:spPr>
+          <a:xfrm>
+            <a:off x="8432800" y="939800"/>
+            <a:ext cx="203200" cy="152400"/>
+          </a:xfrm>
+          <a:prstGeom prst="rect">
+            <a:avLst/>
+          </a:prstGeom>
+          <a:noFill/>
+          <a:ln/>
+        </p:spPr>
+        <p:txBody>
+          <a:bodyPr wrap="square" lIns="0" tIns="0" rIns="0" bIns="0" rtlCol="0" anchor="ctr"/>
+          <a:lstStyle/>
+          <a:p>
+            <a:pPr algn="l" indent="0" marL="0">
+              <a:buNone/>
+            </a:pPr>
+            <a:r>
+              <a:rPr lang="en-US" sz="1200" i="1" dirty="0">
+                <a:solidFill>
+                  <a:srgbClr val="000000"/>
+                </a:solidFill>
+                <a:latin typeface="Arial" pitchFamily="34" charset="0"/>
+                <a:ea typeface="Arial" pitchFamily="34" charset="-122"/>
+                <a:cs typeface="Arial" pitchFamily="34" charset="-120"/>
+              </a:rPr>
+              <a:t>Z</a:t>
+            </a:r>
+            <a:pPr algn="l" indent="0" marL="0">
+              <a:buNone/>
+            </a:pPr>
+            <a:r>
+              <a:rPr lang="en-US" sz="900" i="1" baseline="-40000" dirty="0">
+                <a:solidFill>
+                  <a:srgbClr val="000000"/>
+                </a:solidFill>
+                <a:latin typeface="Arial" pitchFamily="34" charset="0"/>
+                <a:ea typeface="Arial" pitchFamily="34" charset="-122"/>
+                <a:cs typeface="Arial" pitchFamily="34" charset="-120"/>
+              </a:rPr>
+              <a:t>2</a:t>
+            </a:r>
+            <a:endParaRPr lang="en-US" sz="1200" dirty="0"/>
+          </a:p>
+        </p:txBody>
+      </p:sp>
+      <p:pic>
+        <p:nvPicPr>
+          <p:cNvPr id="57" name="Image 15" descr="/home/ahmed/Projects/ai_llm_slides/videos/machine-learning/03_ridger_regression_gradient_descent/recreated_pptx/build/assets/eq_050_Z2.png">    </p:cNvPr>
+          <p:cNvPicPr>
+            <a:picLocks noChangeAspect="1"/>
+          </p:cNvPicPr>
+          <p:nvPr/>
+        </p:nvPicPr>
+        <p:blipFill>
+          <a:blip r:embed="rId16"/>
+          <a:stretch>
+            <a:fillRect/>
+          </a:stretch>
+        </p:blipFill>
+        <p:spPr>
+          <a:xfrm>
+            <a:off x="8432800" y="1092200"/>
+            <a:ext cx="245361" cy="269748"/>
+          </a:xfrm>
+          <a:prstGeom prst="rect">
+            <a:avLst/>
+          </a:prstGeom>
+        </p:spPr>
+      </p:pic>
+      <p:sp>
+        <p:nvSpPr>
+          <p:cNvPr id="58" name="Text 40"/>
+          <p:cNvSpPr/>
+          <p:nvPr/>
+        </p:nvSpPr>
+        <p:spPr>
+          <a:xfrm>
+            <a:off x="8712200" y="939800"/>
+            <a:ext cx="203200" cy="152400"/>
+          </a:xfrm>
+          <a:prstGeom prst="rect">
+            <a:avLst/>
+          </a:prstGeom>
+          <a:noFill/>
+          <a:ln/>
+        </p:spPr>
+        <p:txBody>
+          <a:bodyPr wrap="square" lIns="0" tIns="0" rIns="0" bIns="0" rtlCol="0" anchor="ctr"/>
+          <a:lstStyle/>
+          <a:p>
+            <a:pPr algn="l" indent="0" marL="0">
+              <a:buNone/>
+            </a:pPr>
+            <a:r>
+              <a:rPr lang="en-US" sz="1200" i="1" dirty="0">
+                <a:solidFill>
+                  <a:srgbClr val="000000"/>
+                </a:solidFill>
+                <a:latin typeface="Arial" pitchFamily="34" charset="0"/>
+                <a:ea typeface="Arial" pitchFamily="34" charset="-122"/>
+                <a:cs typeface="Arial" pitchFamily="34" charset="-120"/>
+              </a:rPr>
+              <a:t>Z</a:t>
+            </a:r>
+            <a:pPr algn="l" indent="0" marL="0">
+              <a:buNone/>
+            </a:pPr>
+            <a:r>
+              <a:rPr lang="en-US" sz="900" i="1" baseline="-40000" dirty="0">
+                <a:solidFill>
+                  <a:srgbClr val="000000"/>
+                </a:solidFill>
+                <a:latin typeface="Arial" pitchFamily="34" charset="0"/>
+                <a:ea typeface="Arial" pitchFamily="34" charset="-122"/>
+                <a:cs typeface="Arial" pitchFamily="34" charset="-120"/>
+              </a:rPr>
+              <a:t>3</a:t>
+            </a:r>
+            <a:endParaRPr lang="en-US" sz="1200" dirty="0"/>
+          </a:p>
+        </p:txBody>
+      </p:sp>
+      <p:pic>
+        <p:nvPicPr>
+          <p:cNvPr id="59" name="Image 16" descr="/home/ahmed/Projects/ai_llm_slides/videos/machine-learning/03_ridger_regression_gradient_descent/recreated_pptx/build/assets/eq_050_Z3.png">    </p:cNvPr>
+          <p:cNvPicPr>
+            <a:picLocks noChangeAspect="1"/>
+          </p:cNvPicPr>
+          <p:nvPr/>
+        </p:nvPicPr>
+        <p:blipFill>
+          <a:blip r:embed="rId17"/>
+          <a:stretch>
+            <a:fillRect/>
+          </a:stretch>
+        </p:blipFill>
+        <p:spPr>
+          <a:xfrm>
             <a:off x="8712200" y="1092200"/>
             <a:ext cx="245361" cy="272793"/>
           </a:xfrm>
@@ -2492,7 +2859,7 @@
       </p:pic>
       <p:sp>
         <p:nvSpPr>
-          <p:cNvPr id="42" name="Text 36"/>
+          <p:cNvPr id="60" name="Text 41"/>
           <p:cNvSpPr/>
           <p:nvPr/>
         </p:nvSpPr>
@@ -2629,7 +2996,7 @@
       </p:sp>
       <p:sp>
         <p:nvSpPr>
-          <p:cNvPr id="43" name="Shape 37"/>
+          <p:cNvPr id="61" name="Shape 42"/>
           <p:cNvSpPr/>
           <p:nvPr/>
         </p:nvSpPr>
@@ -2654,14 +3021,14 @@
       </p:sp>
       <p:pic>
         <p:nvPicPr>
-          <p:cNvPr id="44" name="Image 4" descr="/home/ahmed/Projects/ai_llm_slides/videos/machine-learning/03_ridger_regression_gradient_descent/recreated_pptx/build/assets/eq_050_finalW.png">    </p:cNvPr>
+          <p:cNvPr id="62" name="Image 17" descr="/home/ahmed/Projects/ai_llm_slides/videos/machine-learning/03_ridger_regression_gradient_descent/recreated_pptx/build/assets/eq_050_finalW.png">    </p:cNvPr>
           <p:cNvPicPr>
             <a:picLocks noChangeAspect="1"/>
           </p:cNvPicPr>
           <p:nvPr/>
         </p:nvPicPr>
         <p:blipFill>
-          <a:blip r:embed="rId5"/>
+          <a:blip r:embed="rId18"/>
           <a:stretch>
             <a:fillRect/>
           </a:stretch>
@@ -2678,7 +3045,7 @@
       </p:pic>
       <p:sp>
         <p:nvSpPr>
-          <p:cNvPr id="45" name="Shape 38"/>
+          <p:cNvPr id="63" name="Shape 43"/>
           <p:cNvSpPr/>
           <p:nvPr/>
         </p:nvSpPr>
@@ -2703,7 +3070,7 @@
       </p:sp>
       <p:sp>
         <p:nvSpPr>
-          <p:cNvPr id="46" name="Text 39"/>
+          <p:cNvPr id="64" name="Text 44"/>
           <p:cNvSpPr/>
           <p:nvPr/>
         </p:nvSpPr>
@@ -2742,7 +3109,7 @@
       </p:sp>
       <p:sp>
         <p:nvSpPr>
-          <p:cNvPr id="47" name="Text 40"/>
+          <p:cNvPr id="65" name="Text 45"/>
           <p:cNvSpPr/>
           <p:nvPr/>
         </p:nvSpPr>
@@ -2795,7 +3162,7 @@
       </p:sp>
       <p:sp>
         <p:nvSpPr>
-          <p:cNvPr id="48" name="Text 41"/>
+          <p:cNvPr id="66" name="Text 46"/>
           <p:cNvSpPr/>
           <p:nvPr/>
         </p:nvSpPr>
@@ -2848,7 +3215,7 @@
       </p:sp>
       <p:sp>
         <p:nvSpPr>
-          <p:cNvPr id="49" name="Shape 42"/>
+          <p:cNvPr id="67" name="Shape 47"/>
           <p:cNvSpPr/>
           <p:nvPr/>
         </p:nvSpPr>
@@ -2873,7 +3240,7 @@
       </p:sp>
       <p:sp>
         <p:nvSpPr>
-          <p:cNvPr id="50" name="Shape 43"/>
+          <p:cNvPr id="68" name="Shape 48"/>
           <p:cNvSpPr/>
           <p:nvPr/>
         </p:nvSpPr>
@@ -2888,7 +3255,7 @@
           <a:noFill/>
           <a:ln w="12700">
             <a:solidFill>
-              <a:srgbClr val="CFD1CE"/>
+              <a:srgbClr val="DEE0DD"/>
             </a:solidFill>
             <a:prstDash val="solid"/>
           </a:ln>
@@ -2896,7 +3263,7 @@
       </p:sp>
       <p:sp>
         <p:nvSpPr>
-          <p:cNvPr id="51" name="Shape 44"/>
+          <p:cNvPr id="69" name="Shape 49"/>
           <p:cNvSpPr/>
           <p:nvPr/>
         </p:nvSpPr>
@@ -2911,7 +3278,7 @@
           <a:noFill/>
           <a:ln w="12700">
             <a:solidFill>
-              <a:srgbClr val="CFD1CE"/>
+              <a:srgbClr val="DEE0DD"/>
             </a:solidFill>
             <a:prstDash val="solid"/>
           </a:ln>
@@ -2919,7 +3286,7 @@
       </p:sp>
       <p:sp>
         <p:nvSpPr>
-          <p:cNvPr id="52" name="Shape 45"/>
+          <p:cNvPr id="70" name="Shape 50"/>
           <p:cNvSpPr/>
           <p:nvPr/>
         </p:nvSpPr>
@@ -2934,7 +3301,7 @@
           <a:noFill/>
           <a:ln w="12700">
             <a:solidFill>
-              <a:srgbClr val="CFD1CE"/>
+              <a:srgbClr val="DEE0DD"/>
             </a:solidFill>
             <a:prstDash val="solid"/>
           </a:ln>
@@ -2942,7 +3309,7 @@
       </p:sp>
       <p:sp>
         <p:nvSpPr>
-          <p:cNvPr id="53" name="Shape 46"/>
+          <p:cNvPr id="71" name="Shape 51"/>
           <p:cNvSpPr/>
           <p:nvPr/>
         </p:nvSpPr>
@@ -2957,7 +3324,7 @@
           <a:noFill/>
           <a:ln w="12700">
             <a:solidFill>
-              <a:srgbClr val="CFD1CE"/>
+              <a:srgbClr val="DEE0DD"/>
             </a:solidFill>
             <a:prstDash val="solid"/>
           </a:ln>
@@ -2965,7 +3332,7 @@
       </p:sp>
       <p:sp>
         <p:nvSpPr>
-          <p:cNvPr id="54" name="Shape 47"/>
+          <p:cNvPr id="72" name="Shape 52"/>
           <p:cNvSpPr/>
           <p:nvPr/>
         </p:nvSpPr>
@@ -2980,7 +3347,7 @@
           <a:noFill/>
           <a:ln w="12700">
             <a:solidFill>
-              <a:srgbClr val="CFD1CE"/>
+              <a:srgbClr val="DEE0DD"/>
             </a:solidFill>
             <a:prstDash val="solid"/>
           </a:ln>
@@ -2988,7 +3355,7 @@
       </p:sp>
       <p:sp>
         <p:nvSpPr>
-          <p:cNvPr id="55" name="Shape 48"/>
+          <p:cNvPr id="73" name="Shape 53"/>
           <p:cNvSpPr/>
           <p:nvPr/>
         </p:nvSpPr>
@@ -3003,7 +3370,7 @@
           <a:noFill/>
           <a:ln w="12700">
             <a:solidFill>
-              <a:srgbClr val="CFD1CE"/>
+              <a:srgbClr val="DEE0DD"/>
             </a:solidFill>
             <a:prstDash val="solid"/>
           </a:ln>
@@ -3011,7 +3378,7 @@
       </p:sp>
       <p:sp>
         <p:nvSpPr>
-          <p:cNvPr id="56" name="Shape 49"/>
+          <p:cNvPr id="74" name="Shape 54"/>
           <p:cNvSpPr/>
           <p:nvPr/>
         </p:nvSpPr>
@@ -3026,7 +3393,7 @@
           <a:noFill/>
           <a:ln w="12700">
             <a:solidFill>
-              <a:srgbClr val="CFD1CE"/>
+              <a:srgbClr val="DEE0DD"/>
             </a:solidFill>
             <a:prstDash val="solid"/>
           </a:ln>
@@ -3034,7 +3401,7 @@
       </p:sp>
       <p:sp>
         <p:nvSpPr>
-          <p:cNvPr id="57" name="Shape 50"/>
+          <p:cNvPr id="75" name="Shape 55"/>
           <p:cNvSpPr/>
           <p:nvPr/>
         </p:nvSpPr>
@@ -3049,7 +3416,7 @@
           <a:noFill/>
           <a:ln w="12700">
             <a:solidFill>
-              <a:srgbClr val="CFD1CE"/>
+              <a:srgbClr val="DEE0DD"/>
             </a:solidFill>
             <a:prstDash val="solid"/>
           </a:ln>
@@ -3057,7 +3424,7 @@
       </p:sp>
       <p:sp>
         <p:nvSpPr>
-          <p:cNvPr id="58" name="Shape 51"/>
+          <p:cNvPr id="76" name="Shape 56"/>
           <p:cNvSpPr/>
           <p:nvPr/>
         </p:nvSpPr>
@@ -3072,7 +3439,7 @@
           <a:noFill/>
           <a:ln w="12700">
             <a:solidFill>
-              <a:srgbClr val="CFD1CE"/>
+              <a:srgbClr val="DEE0DD"/>
             </a:solidFill>
             <a:prstDash val="solid"/>
           </a:ln>
@@ -3080,7 +3447,7 @@
       </p:sp>
       <p:sp>
         <p:nvSpPr>
-          <p:cNvPr id="59" name="Text 52"/>
+          <p:cNvPr id="77" name="Text 57"/>
           <p:cNvSpPr/>
           <p:nvPr/>
         </p:nvSpPr>
@@ -3119,7 +3486,7 @@
       </p:sp>
       <p:sp>
         <p:nvSpPr>
-          <p:cNvPr id="60" name="Text 53"/>
+          <p:cNvPr id="78" name="Text 58"/>
           <p:cNvSpPr/>
           <p:nvPr/>
         </p:nvSpPr>
@@ -3158,7 +3525,7 @@
       </p:sp>
       <p:sp>
         <p:nvSpPr>
-          <p:cNvPr id="61" name="Text 54"/>
+          <p:cNvPr id="79" name="Text 59"/>
           <p:cNvSpPr/>
           <p:nvPr/>
         </p:nvSpPr>
@@ -3197,7 +3564,7 @@
       </p:sp>
       <p:sp>
         <p:nvSpPr>
-          <p:cNvPr id="62" name="Text 55"/>
+          <p:cNvPr id="80" name="Text 60"/>
           <p:cNvSpPr/>
           <p:nvPr/>
         </p:nvSpPr>
@@ -3236,7 +3603,7 @@
       </p:sp>
       <p:sp>
         <p:nvSpPr>
-          <p:cNvPr id="63" name="Text 56"/>
+          <p:cNvPr id="81" name="Text 61"/>
           <p:cNvSpPr/>
           <p:nvPr/>
         </p:nvSpPr>
@@ -3275,7 +3642,7 @@
       </p:sp>
       <p:sp>
         <p:nvSpPr>
-          <p:cNvPr id="64" name="Text 57"/>
+          <p:cNvPr id="82" name="Text 62"/>
           <p:cNvSpPr/>
           <p:nvPr/>
         </p:nvSpPr>
@@ -3314,7 +3681,7 @@
       </p:sp>
       <p:sp>
         <p:nvSpPr>
-          <p:cNvPr id="65" name="Text 58"/>
+          <p:cNvPr id="83" name="Text 63"/>
           <p:cNvSpPr/>
           <p:nvPr/>
         </p:nvSpPr>
@@ -3353,7 +3720,7 @@
       </p:sp>
       <p:sp>
         <p:nvSpPr>
-          <p:cNvPr id="66" name="Text 59"/>
+          <p:cNvPr id="84" name="Text 64"/>
           <p:cNvSpPr/>
           <p:nvPr/>
         </p:nvSpPr>
@@ -3392,7 +3759,7 @@
       </p:sp>
       <p:sp>
         <p:nvSpPr>
-          <p:cNvPr id="67" name="Text 60"/>
+          <p:cNvPr id="85" name="Text 65"/>
           <p:cNvSpPr/>
           <p:nvPr/>
         </p:nvSpPr>
@@ -3431,7 +3798,7 @@
       </p:sp>
       <p:sp>
         <p:nvSpPr>
-          <p:cNvPr id="68" name="Text 61"/>
+          <p:cNvPr id="86" name="Text 66"/>
           <p:cNvSpPr/>
           <p:nvPr/>
         </p:nvSpPr>
@@ -3470,7 +3837,7 @@
       </p:sp>
       <p:sp>
         <p:nvSpPr>
-          <p:cNvPr id="69" name="Text 62"/>
+          <p:cNvPr id="87" name="Text 67"/>
           <p:cNvSpPr/>
           <p:nvPr/>
         </p:nvSpPr>
@@ -3509,7 +3876,7 @@
       </p:sp>
       <p:sp>
         <p:nvSpPr>
-          <p:cNvPr id="70" name="Text 63"/>
+          <p:cNvPr id="88" name="Text 68"/>
           <p:cNvSpPr/>
           <p:nvPr/>
         </p:nvSpPr>
@@ -3548,7 +3915,7 @@
       </p:sp>
       <p:sp>
         <p:nvSpPr>
-          <p:cNvPr id="71" name="Text 64"/>
+          <p:cNvPr id="89" name="Text 69"/>
           <p:cNvSpPr/>
           <p:nvPr/>
         </p:nvSpPr>
@@ -3587,7 +3954,7 @@
       </p:sp>
       <p:sp>
         <p:nvSpPr>
-          <p:cNvPr id="72" name="Text 65"/>
+          <p:cNvPr id="90" name="Text 70"/>
           <p:cNvSpPr/>
           <p:nvPr/>
         </p:nvSpPr>
@@ -3626,7 +3993,7 @@
       </p:sp>
       <p:sp>
         <p:nvSpPr>
-          <p:cNvPr id="73" name="Text 66"/>
+          <p:cNvPr id="91" name="Text 71"/>
           <p:cNvSpPr/>
           <p:nvPr/>
         </p:nvSpPr>
@@ -3665,7 +4032,7 @@
       </p:sp>
       <p:sp>
         <p:nvSpPr>
-          <p:cNvPr id="74" name="Text 67"/>
+          <p:cNvPr id="92" name="Text 72"/>
           <p:cNvSpPr/>
           <p:nvPr/>
         </p:nvSpPr>
@@ -3704,7 +4071,7 @@
       </p:sp>
       <p:sp>
         <p:nvSpPr>
-          <p:cNvPr id="75" name="Text 68"/>
+          <p:cNvPr id="93" name="Text 73"/>
           <p:cNvSpPr/>
           <p:nvPr/>
         </p:nvSpPr>
@@ -3743,7 +4110,7 @@
       </p:sp>
       <p:sp>
         <p:nvSpPr>
-          <p:cNvPr id="76" name="Shape 69"/>
+          <p:cNvPr id="94" name="Shape 74"/>
           <p:cNvSpPr/>
           <p:nvPr/>
         </p:nvSpPr>
@@ -3761,13 +4128,12 @@
               <a:srgbClr val="92211B"/>
             </a:solidFill>
             <a:prstDash val="solid"/>
-            <a:tailEnd type="triangle"/>
           </a:ln>
         </p:spPr>
       </p:sp>
       <p:sp>
         <p:nvSpPr>
-          <p:cNvPr id="77" name="Shape 70"/>
+          <p:cNvPr id="95" name="Shape 75"/>
           <p:cNvSpPr/>
           <p:nvPr/>
         </p:nvSpPr>
@@ -3792,7 +4158,7 @@
       </p:sp>
       <p:sp>
         <p:nvSpPr>
-          <p:cNvPr id="78" name="Shape 71"/>
+          <p:cNvPr id="96" name="Shape 76"/>
           <p:cNvSpPr/>
           <p:nvPr/>
         </p:nvSpPr>
@@ -3817,7 +4183,7 @@
       </p:sp>
       <p:sp>
         <p:nvSpPr>
-          <p:cNvPr id="79" name="Shape 72"/>
+          <p:cNvPr id="97" name="Shape 77"/>
           <p:cNvSpPr/>
           <p:nvPr/>
         </p:nvSpPr>
@@ -3842,7 +4208,7 @@
       </p:sp>
       <p:sp>
         <p:nvSpPr>
-          <p:cNvPr id="80" name="Shape 73"/>
+          <p:cNvPr id="98" name="Shape 78"/>
           <p:cNvSpPr/>
           <p:nvPr/>
         </p:nvSpPr>
@@ -3855,11 +4221,11 @@
             <a:avLst/>
           </a:prstGeom>
           <a:solidFill>
-            <a:srgbClr val="FF94FF"/>
+            <a:srgbClr val="E03FEB"/>
           </a:solidFill>
           <a:ln w="12700">
             <a:solidFill>
-              <a:srgbClr val="FF94FF"/>
+              <a:srgbClr val="E03FEB"/>
             </a:solidFill>
             <a:prstDash val="solid"/>
           </a:ln>
@@ -3867,7 +4233,7 @@
       </p:sp>
       <p:sp>
         <p:nvSpPr>
-          <p:cNvPr id="81" name="Shape 74"/>
+          <p:cNvPr id="99" name="Shape 79"/>
           <p:cNvSpPr/>
           <p:nvPr/>
         </p:nvSpPr>
@@ -3880,11 +4246,11 @@
             <a:avLst/>
           </a:prstGeom>
           <a:solidFill>
-            <a:srgbClr val="FF94FF"/>
+            <a:srgbClr val="E03FEB"/>
           </a:solidFill>
           <a:ln w="12700">
             <a:solidFill>
-              <a:srgbClr val="FF94FF"/>
+              <a:srgbClr val="E03FEB"/>
             </a:solidFill>
             <a:prstDash val="solid"/>
           </a:ln>
@@ -3892,7 +4258,7 @@
       </p:sp>
       <p:sp>
         <p:nvSpPr>
-          <p:cNvPr id="82" name="Shape 75"/>
+          <p:cNvPr id="100" name="Shape 80"/>
           <p:cNvSpPr/>
           <p:nvPr/>
         </p:nvSpPr>
@@ -3905,11 +4271,11 @@
             <a:avLst/>
           </a:prstGeom>
           <a:solidFill>
-            <a:srgbClr val="FF94FF"/>
+            <a:srgbClr val="E03FEB"/>
           </a:solidFill>
           <a:ln w="12700">
             <a:solidFill>
-              <a:srgbClr val="FF94FF"/>
+              <a:srgbClr val="E03FEB"/>
             </a:solidFill>
             <a:prstDash val="solid"/>
           </a:ln>
@@ -3917,7 +4283,7 @@
       </p:sp>
       <p:sp>
         <p:nvSpPr>
-          <p:cNvPr id="83" name="Shape 76"/>
+          <p:cNvPr id="101" name="Shape 81"/>
           <p:cNvSpPr/>
           <p:nvPr/>
         </p:nvSpPr>
@@ -3942,7 +4308,7 @@
       </p:sp>
       <p:sp>
         <p:nvSpPr>
-          <p:cNvPr id="84" name="Shape 77"/>
+          <p:cNvPr id="102" name="Shape 82"/>
           <p:cNvSpPr/>
           <p:nvPr/>
         </p:nvSpPr>
@@ -3967,7 +4333,7 @@
       </p:sp>
       <p:sp>
         <p:nvSpPr>
-          <p:cNvPr id="85" name="Shape 78"/>
+          <p:cNvPr id="103" name="Shape 83"/>
           <p:cNvSpPr/>
           <p:nvPr/>
         </p:nvSpPr>
@@ -3992,13 +4358,13 @@
       </p:sp>
       <p:sp>
         <p:nvSpPr>
-          <p:cNvPr id="86" name="Text 79"/>
-          <p:cNvSpPr/>
-          <p:nvPr/>
-        </p:nvSpPr>
-        <p:spPr>
-          <a:xfrm>
-            <a:off x="4714570" y="3872527"/>
+          <p:cNvPr id="104" name="Text 84"/>
+          <p:cNvSpPr/>
+          <p:nvPr/>
+        </p:nvSpPr>
+        <p:spPr>
+          <a:xfrm>
+            <a:off x="4622800" y="3872527"/>
             <a:ext cx="533400" cy="152400"/>
           </a:xfrm>
           <a:prstGeom prst="rect">
@@ -4031,14 +4397,14 @@
       </p:sp>
       <p:sp>
         <p:nvSpPr>
-          <p:cNvPr id="87" name="Shape 80"/>
-          <p:cNvSpPr/>
-          <p:nvPr/>
-        </p:nvSpPr>
-        <p:spPr>
-          <a:xfrm>
-            <a:off x="4746908" y="3656585"/>
-            <a:ext cx="395068" cy="218132"/>
+          <p:cNvPr id="105" name="Shape 85"/>
+          <p:cNvSpPr/>
+          <p:nvPr/>
+        </p:nvSpPr>
+        <p:spPr>
+          <a:xfrm flipH="1">
+            <a:off x="5067300" y="3924300"/>
+            <a:ext cx="203200" cy="215900"/>
           </a:xfrm>
           <a:prstGeom prst="line">
             <a:avLst/>
@@ -4055,31 +4421,7 @@
       </p:sp>
       <p:sp>
         <p:nvSpPr>
-          <p:cNvPr id="88" name="Shape 81"/>
-          <p:cNvSpPr/>
-          <p:nvPr/>
-        </p:nvSpPr>
-        <p:spPr>
-          <a:xfrm>
-            <a:off x="4847349" y="4050002"/>
-            <a:ext cx="194186" cy="109066"/>
-          </a:xfrm>
-          <a:prstGeom prst="line">
-            <a:avLst/>
-          </a:prstGeom>
-          <a:noFill/>
-          <a:ln w="38100">
-            <a:solidFill>
-              <a:srgbClr val="92211B"/>
-            </a:solidFill>
-            <a:prstDash val="solid"/>
-            <a:headEnd type="triangle"/>
-          </a:ln>
-        </p:spPr>
-      </p:sp>
-      <p:sp>
-        <p:nvSpPr>
-          <p:cNvPr id="89" name="Shape 82"/>
+          <p:cNvPr id="106" name="Shape 86"/>
           <p:cNvSpPr/>
           <p:nvPr/>
         </p:nvSpPr>
@@ -4104,7 +4446,7 @@
       </p:sp>
       <p:sp>
         <p:nvSpPr>
-          <p:cNvPr id="90" name="Text 83"/>
+          <p:cNvPr id="107" name="Text 87"/>
           <p:cNvSpPr/>
           <p:nvPr/>
         </p:nvSpPr>
@@ -4143,7 +4485,7 @@
       </p:sp>
       <p:sp>
         <p:nvSpPr>
-          <p:cNvPr id="91" name="Text 84"/>
+          <p:cNvPr id="108" name="Text 88"/>
           <p:cNvSpPr/>
           <p:nvPr/>
         </p:nvSpPr>
@@ -4196,7 +4538,7 @@
       </p:sp>
       <p:sp>
         <p:nvSpPr>
-          <p:cNvPr id="92" name="Text 85"/>
+          <p:cNvPr id="109" name="Text 89"/>
           <p:cNvSpPr/>
           <p:nvPr/>
         </p:nvSpPr>
@@ -4249,7 +4591,7 @@
       </p:sp>
       <p:sp>
         <p:nvSpPr>
-          <p:cNvPr id="93" name="Text 86"/>
+          <p:cNvPr id="110" name="Text 90"/>
           <p:cNvSpPr/>
           <p:nvPr/>
         </p:nvSpPr>
@@ -4302,7 +4644,7 @@
       </p:sp>
       <p:sp>
         <p:nvSpPr>
-          <p:cNvPr id="94" name="Text 87"/>
+          <p:cNvPr id="111" name="Text 91"/>
           <p:cNvSpPr/>
           <p:nvPr/>
         </p:nvSpPr>
@@ -4355,7 +4697,7 @@
       </p:sp>
       <p:sp>
         <p:nvSpPr>
-          <p:cNvPr id="95" name="Text 88"/>
+          <p:cNvPr id="112" name="Text 92"/>
           <p:cNvSpPr/>
           <p:nvPr/>
         </p:nvSpPr>
@@ -4408,7 +4750,7 @@
       </p:sp>
       <p:sp>
         <p:nvSpPr>
-          <p:cNvPr id="96" name="Text 89"/>
+          <p:cNvPr id="113" name="Text 93"/>
           <p:cNvSpPr/>
           <p:nvPr/>
         </p:nvSpPr>
@@ -4461,14 +4803,14 @@
       </p:sp>
       <p:sp>
         <p:nvSpPr>
-          <p:cNvPr id="97" name="Text 90"/>
-          <p:cNvSpPr/>
-          <p:nvPr/>
-        </p:nvSpPr>
-        <p:spPr>
-          <a:xfrm>
-            <a:off x="1181100" y="2298700"/>
-            <a:ext cx="254000" cy="127000"/>
+          <p:cNvPr id="114" name="Text 94"/>
+          <p:cNvSpPr/>
+          <p:nvPr/>
+        </p:nvSpPr>
+        <p:spPr>
+          <a:xfrm>
+            <a:off x="1193800" y="2311400"/>
+            <a:ext cx="139700" cy="127000"/>
           </a:xfrm>
           <a:prstGeom prst="rect">
             <a:avLst/>
@@ -4492,7 +4834,7 @@
                 <a:ea typeface="Arial" pitchFamily="34" charset="-122"/>
                 <a:cs typeface="Arial" pitchFamily="34" charset="-120"/>
               </a:rPr>
-              <a:t>(1)</a:t>
+              <a:t>1</a:t>
             </a:r>
             <a:endParaRPr lang="en-US" sz="1000" dirty="0"/>
           </a:p>
@@ -4500,14 +4842,14 @@
       </p:sp>
       <p:sp>
         <p:nvSpPr>
-          <p:cNvPr id="98" name="Text 91"/>
-          <p:cNvSpPr/>
-          <p:nvPr/>
-        </p:nvSpPr>
-        <p:spPr>
-          <a:xfrm>
-            <a:off x="1447800" y="2298700"/>
-            <a:ext cx="254000" cy="127000"/>
+          <p:cNvPr id="115" name="Text 95"/>
+          <p:cNvSpPr/>
+          <p:nvPr/>
+        </p:nvSpPr>
+        <p:spPr>
+          <a:xfrm>
+            <a:off x="1473200" y="2311400"/>
+            <a:ext cx="139700" cy="127000"/>
           </a:xfrm>
           <a:prstGeom prst="rect">
             <a:avLst/>
@@ -4531,7 +4873,7 @@
                 <a:ea typeface="Arial" pitchFamily="34" charset="-122"/>
                 <a:cs typeface="Arial" pitchFamily="34" charset="-120"/>
               </a:rPr>
-              <a:t>(1)</a:t>
+              <a:t>1</a:t>
             </a:r>
             <a:endParaRPr lang="en-US" sz="1000" dirty="0"/>
           </a:p>
@@ -4539,14 +4881,14 @@
       </p:sp>
       <p:sp>
         <p:nvSpPr>
-          <p:cNvPr id="99" name="Text 92"/>
-          <p:cNvSpPr/>
-          <p:nvPr/>
-        </p:nvSpPr>
-        <p:spPr>
-          <a:xfrm>
-            <a:off x="1739900" y="2298700"/>
-            <a:ext cx="254000" cy="127000"/>
+          <p:cNvPr id="116" name="Text 96"/>
+          <p:cNvSpPr/>
+          <p:nvPr/>
+        </p:nvSpPr>
+        <p:spPr>
+          <a:xfrm>
+            <a:off x="1752600" y="2311400"/>
+            <a:ext cx="139700" cy="127000"/>
           </a:xfrm>
           <a:prstGeom prst="rect">
             <a:avLst/>
@@ -4570,7 +4912,7 @@
                 <a:ea typeface="Arial" pitchFamily="34" charset="-122"/>
                 <a:cs typeface="Arial" pitchFamily="34" charset="-120"/>
               </a:rPr>
-              <a:t>(1)</a:t>
+              <a:t>1</a:t>
             </a:r>
             <a:endParaRPr lang="en-US" sz="1000" dirty="0"/>
           </a:p>
@@ -4578,14 +4920,14 @@
       </p:sp>
       <p:sp>
         <p:nvSpPr>
-          <p:cNvPr id="100" name="Text 93"/>
-          <p:cNvSpPr/>
-          <p:nvPr/>
-        </p:nvSpPr>
-        <p:spPr>
-          <a:xfrm>
-            <a:off x="2019300" y="2298700"/>
-            <a:ext cx="254000" cy="127000"/>
+          <p:cNvPr id="117" name="Text 97"/>
+          <p:cNvSpPr/>
+          <p:nvPr/>
+        </p:nvSpPr>
+        <p:spPr>
+          <a:xfrm>
+            <a:off x="2044700" y="2311400"/>
+            <a:ext cx="139700" cy="127000"/>
           </a:xfrm>
           <a:prstGeom prst="rect">
             <a:avLst/>
@@ -4609,7 +4951,7 @@
                 <a:ea typeface="Arial" pitchFamily="34" charset="-122"/>
                 <a:cs typeface="Arial" pitchFamily="34" charset="-120"/>
               </a:rPr>
-              <a:t>(1)</a:t>
+              <a:t>1</a:t>
             </a:r>
             <a:endParaRPr lang="en-US" sz="1000" dirty="0"/>
           </a:p>
@@ -4617,14 +4959,14 @@
       </p:sp>
       <p:sp>
         <p:nvSpPr>
-          <p:cNvPr id="101" name="Text 94"/>
-          <p:cNvSpPr/>
-          <p:nvPr/>
-        </p:nvSpPr>
-        <p:spPr>
-          <a:xfrm>
-            <a:off x="2311400" y="2298700"/>
-            <a:ext cx="254000" cy="127000"/>
+          <p:cNvPr id="118" name="Text 98"/>
+          <p:cNvSpPr/>
+          <p:nvPr/>
+        </p:nvSpPr>
+        <p:spPr>
+          <a:xfrm>
+            <a:off x="2324100" y="2311400"/>
+            <a:ext cx="139700" cy="127000"/>
           </a:xfrm>
           <a:prstGeom prst="rect">
             <a:avLst/>
@@ -4648,7 +4990,7 @@
                 <a:ea typeface="Arial" pitchFamily="34" charset="-122"/>
                 <a:cs typeface="Arial" pitchFamily="34" charset="-120"/>
               </a:rPr>
-              <a:t>(1)</a:t>
+              <a:t>1</a:t>
             </a:r>
             <a:endParaRPr lang="en-US" sz="1000" dirty="0"/>
           </a:p>
@@ -4656,14 +4998,14 @@
       </p:sp>
       <p:sp>
         <p:nvSpPr>
-          <p:cNvPr id="102" name="Text 95"/>
-          <p:cNvSpPr/>
-          <p:nvPr/>
-        </p:nvSpPr>
-        <p:spPr>
-          <a:xfrm>
-            <a:off x="2590800" y="2298700"/>
-            <a:ext cx="254000" cy="127000"/>
+          <p:cNvPr id="119" name="Text 99"/>
+          <p:cNvSpPr/>
+          <p:nvPr/>
+        </p:nvSpPr>
+        <p:spPr>
+          <a:xfrm>
+            <a:off x="2616200" y="2311400"/>
+            <a:ext cx="139700" cy="127000"/>
           </a:xfrm>
           <a:prstGeom prst="rect">
             <a:avLst/>
@@ -4687,7 +5029,7 @@
                 <a:ea typeface="Arial" pitchFamily="34" charset="-122"/>
                 <a:cs typeface="Arial" pitchFamily="34" charset="-120"/>
               </a:rPr>
-              <a:t>(1)</a:t>
+              <a:t>1</a:t>
             </a:r>
             <a:endParaRPr lang="en-US" sz="1000" dirty="0"/>
           </a:p>
@@ -4695,14 +5037,14 @@
       </p:sp>
       <p:sp>
         <p:nvSpPr>
-          <p:cNvPr id="103" name="Text 96"/>
-          <p:cNvSpPr/>
-          <p:nvPr/>
-        </p:nvSpPr>
-        <p:spPr>
-          <a:xfrm>
-            <a:off x="1181100" y="2489200"/>
-            <a:ext cx="254000" cy="127000"/>
+          <p:cNvPr id="120" name="Text 100"/>
+          <p:cNvSpPr/>
+          <p:nvPr/>
+        </p:nvSpPr>
+        <p:spPr>
+          <a:xfrm>
+            <a:off x="1193800" y="2514600"/>
+            <a:ext cx="139700" cy="127000"/>
           </a:xfrm>
           <a:prstGeom prst="rect">
             <a:avLst/>
@@ -4726,7 +5068,7 @@
                 <a:ea typeface="Arial" pitchFamily="34" charset="-122"/>
                 <a:cs typeface="Arial" pitchFamily="34" charset="-120"/>
               </a:rPr>
-              <a:t>(1)</a:t>
+              <a:t>1</a:t>
             </a:r>
             <a:endParaRPr lang="en-US" sz="1000" dirty="0"/>
           </a:p>
@@ -4734,14 +5076,14 @@
       </p:sp>
       <p:sp>
         <p:nvSpPr>
-          <p:cNvPr id="104" name="Text 97"/>
-          <p:cNvSpPr/>
-          <p:nvPr/>
-        </p:nvSpPr>
-        <p:spPr>
-          <a:xfrm>
-            <a:off x="1447800" y="2489200"/>
-            <a:ext cx="254000" cy="127000"/>
+          <p:cNvPr id="121" name="Text 101"/>
+          <p:cNvSpPr/>
+          <p:nvPr/>
+        </p:nvSpPr>
+        <p:spPr>
+          <a:xfrm>
+            <a:off x="1473200" y="2514600"/>
+            <a:ext cx="139700" cy="127000"/>
           </a:xfrm>
           <a:prstGeom prst="rect">
             <a:avLst/>
@@ -4765,7 +5107,7 @@
                 <a:ea typeface="Arial" pitchFamily="34" charset="-122"/>
                 <a:cs typeface="Arial" pitchFamily="34" charset="-120"/>
               </a:rPr>
-              <a:t>(2)</a:t>
+              <a:t>2</a:t>
             </a:r>
             <a:endParaRPr lang="en-US" sz="1000" dirty="0"/>
           </a:p>
@@ -4773,14 +5115,14 @@
       </p:sp>
       <p:sp>
         <p:nvSpPr>
-          <p:cNvPr id="105" name="Text 98"/>
-          <p:cNvSpPr/>
-          <p:nvPr/>
-        </p:nvSpPr>
-        <p:spPr>
-          <a:xfrm>
-            <a:off x="1739900" y="2489200"/>
-            <a:ext cx="254000" cy="127000"/>
+          <p:cNvPr id="122" name="Text 102"/>
+          <p:cNvSpPr/>
+          <p:nvPr/>
+        </p:nvSpPr>
+        <p:spPr>
+          <a:xfrm>
+            <a:off x="1752600" y="2514600"/>
+            <a:ext cx="139700" cy="127000"/>
           </a:xfrm>
           <a:prstGeom prst="rect">
             <a:avLst/>
@@ -4804,7 +5146,7 @@
                 <a:ea typeface="Arial" pitchFamily="34" charset="-122"/>
                 <a:cs typeface="Arial" pitchFamily="34" charset="-120"/>
               </a:rPr>
-              <a:t>(1)</a:t>
+              <a:t>1</a:t>
             </a:r>
             <a:endParaRPr lang="en-US" sz="1000" dirty="0"/>
           </a:p>
@@ -4812,14 +5154,14 @@
       </p:sp>
       <p:sp>
         <p:nvSpPr>
-          <p:cNvPr id="106" name="Text 99"/>
-          <p:cNvSpPr/>
-          <p:nvPr/>
-        </p:nvSpPr>
-        <p:spPr>
-          <a:xfrm>
-            <a:off x="2019300" y="2489200"/>
-            <a:ext cx="254000" cy="127000"/>
+          <p:cNvPr id="123" name="Text 103"/>
+          <p:cNvSpPr/>
+          <p:nvPr/>
+        </p:nvSpPr>
+        <p:spPr>
+          <a:xfrm>
+            <a:off x="2044700" y="2514600"/>
+            <a:ext cx="139700" cy="127000"/>
           </a:xfrm>
           <a:prstGeom prst="rect">
             <a:avLst/>
@@ -4843,7 +5185,7 @@
                 <a:ea typeface="Arial" pitchFamily="34" charset="-122"/>
                 <a:cs typeface="Arial" pitchFamily="34" charset="-120"/>
               </a:rPr>
-              <a:t>(5)</a:t>
+              <a:t>5</a:t>
             </a:r>
             <a:endParaRPr lang="en-US" sz="1000" dirty="0"/>
           </a:p>
@@ -4851,14 +5193,14 @@
       </p:sp>
       <p:sp>
         <p:nvSpPr>
-          <p:cNvPr id="107" name="Text 100"/>
-          <p:cNvSpPr/>
-          <p:nvPr/>
-        </p:nvSpPr>
-        <p:spPr>
-          <a:xfrm>
-            <a:off x="2311400" y="2489200"/>
-            <a:ext cx="254000" cy="127000"/>
+          <p:cNvPr id="124" name="Text 104"/>
+          <p:cNvSpPr/>
+          <p:nvPr/>
+        </p:nvSpPr>
+        <p:spPr>
+          <a:xfrm>
+            <a:off x="2324100" y="2514600"/>
+            <a:ext cx="139700" cy="127000"/>
           </a:xfrm>
           <a:prstGeom prst="rect">
             <a:avLst/>
@@ -4882,7 +5224,7 @@
                 <a:ea typeface="Arial" pitchFamily="34" charset="-122"/>
                 <a:cs typeface="Arial" pitchFamily="34" charset="-120"/>
               </a:rPr>
-              <a:t>(6)</a:t>
+              <a:t>6</a:t>
             </a:r>
             <a:endParaRPr lang="en-US" sz="1000" dirty="0"/>
           </a:p>
@@ -4890,14 +5232,14 @@
       </p:sp>
       <p:sp>
         <p:nvSpPr>
-          <p:cNvPr id="108" name="Text 101"/>
-          <p:cNvSpPr/>
-          <p:nvPr/>
-        </p:nvSpPr>
-        <p:spPr>
-          <a:xfrm>
-            <a:off x="2590800" y="2489200"/>
-            <a:ext cx="254000" cy="127000"/>
+          <p:cNvPr id="125" name="Text 105"/>
+          <p:cNvSpPr/>
+          <p:nvPr/>
+        </p:nvSpPr>
+        <p:spPr>
+          <a:xfrm>
+            <a:off x="2616200" y="2514600"/>
+            <a:ext cx="139700" cy="127000"/>
           </a:xfrm>
           <a:prstGeom prst="rect">
             <a:avLst/>
@@ -4921,7 +5263,7 @@
                 <a:ea typeface="Arial" pitchFamily="34" charset="-122"/>
                 <a:cs typeface="Arial" pitchFamily="34" charset="-120"/>
               </a:rPr>
-              <a:t>(6)</a:t>
+              <a:t>6</a:t>
             </a:r>
             <a:endParaRPr lang="en-US" sz="1000" dirty="0"/>
           </a:p>
@@ -4929,14 +5271,14 @@
       </p:sp>
       <p:sp>
         <p:nvSpPr>
-          <p:cNvPr id="109" name="Text 102"/>
-          <p:cNvSpPr/>
-          <p:nvPr/>
-        </p:nvSpPr>
-        <p:spPr>
-          <a:xfrm>
-            <a:off x="1181100" y="2692400"/>
-            <a:ext cx="254000" cy="127000"/>
+          <p:cNvPr id="126" name="Text 106"/>
+          <p:cNvSpPr/>
+          <p:nvPr/>
+        </p:nvSpPr>
+        <p:spPr>
+          <a:xfrm>
+            <a:off x="1193800" y="2705100"/>
+            <a:ext cx="139700" cy="127000"/>
           </a:xfrm>
           <a:prstGeom prst="rect">
             <a:avLst/>
@@ -4960,7 +5302,7 @@
                 <a:ea typeface="Arial" pitchFamily="34" charset="-122"/>
                 <a:cs typeface="Arial" pitchFamily="34" charset="-120"/>
               </a:rPr>
-              <a:t>(1)</a:t>
+              <a:t>1</a:t>
             </a:r>
             <a:endParaRPr lang="en-US" sz="1000" dirty="0"/>
           </a:p>
@@ -4968,14 +5310,14 @@
       </p:sp>
       <p:sp>
         <p:nvSpPr>
-          <p:cNvPr id="110" name="Text 103"/>
-          <p:cNvSpPr/>
-          <p:nvPr/>
-        </p:nvSpPr>
-        <p:spPr>
-          <a:xfrm>
-            <a:off x="1447800" y="2692400"/>
-            <a:ext cx="254000" cy="127000"/>
+          <p:cNvPr id="127" name="Text 107"/>
+          <p:cNvSpPr/>
+          <p:nvPr/>
+        </p:nvSpPr>
+        <p:spPr>
+          <a:xfrm>
+            <a:off x="1473200" y="2705100"/>
+            <a:ext cx="139700" cy="127000"/>
           </a:xfrm>
           <a:prstGeom prst="rect">
             <a:avLst/>
@@ -4999,7 +5341,7 @@
                 <a:ea typeface="Arial" pitchFamily="34" charset="-122"/>
                 <a:cs typeface="Arial" pitchFamily="34" charset="-120"/>
               </a:rPr>
-              <a:t>(1)</a:t>
+              <a:t>1</a:t>
             </a:r>
             <a:endParaRPr lang="en-US" sz="1000" dirty="0"/>
           </a:p>
@@ -5007,14 +5349,14 @@
       </p:sp>
       <p:sp>
         <p:nvSpPr>
-          <p:cNvPr id="111" name="Text 104"/>
-          <p:cNvSpPr/>
-          <p:nvPr/>
-        </p:nvSpPr>
-        <p:spPr>
-          <a:xfrm>
-            <a:off x="1739900" y="2692400"/>
-            <a:ext cx="254000" cy="127000"/>
+          <p:cNvPr id="128" name="Text 108"/>
+          <p:cNvSpPr/>
+          <p:nvPr/>
+        </p:nvSpPr>
+        <p:spPr>
+          <a:xfrm>
+            <a:off x="1752600" y="2705100"/>
+            <a:ext cx="139700" cy="127000"/>
           </a:xfrm>
           <a:prstGeom prst="rect">
             <a:avLst/>
@@ -5038,7 +5380,7 @@
                 <a:ea typeface="Arial" pitchFamily="34" charset="-122"/>
                 <a:cs typeface="Arial" pitchFamily="34" charset="-120"/>
               </a:rPr>
-              <a:t>(2)</a:t>
+              <a:t>2</a:t>
             </a:r>
             <a:endParaRPr lang="en-US" sz="1000" dirty="0"/>
           </a:p>
@@ -5046,14 +5388,14 @@
       </p:sp>
       <p:sp>
         <p:nvSpPr>
-          <p:cNvPr id="112" name="Text 105"/>
-          <p:cNvSpPr/>
-          <p:nvPr/>
-        </p:nvSpPr>
-        <p:spPr>
-          <a:xfrm>
-            <a:off x="2019300" y="2692400"/>
-            <a:ext cx="254000" cy="127000"/>
+          <p:cNvPr id="129" name="Text 109"/>
+          <p:cNvSpPr/>
+          <p:nvPr/>
+        </p:nvSpPr>
+        <p:spPr>
+          <a:xfrm>
+            <a:off x="2044700" y="2705100"/>
+            <a:ext cx="139700" cy="127000"/>
           </a:xfrm>
           <a:prstGeom prst="rect">
             <a:avLst/>
@@ -5077,7 +5419,7 @@
                 <a:ea typeface="Arial" pitchFamily="34" charset="-122"/>
                 <a:cs typeface="Arial" pitchFamily="34" charset="-120"/>
               </a:rPr>
-              <a:t>(4)</a:t>
+              <a:t>4</a:t>
             </a:r>
             <a:endParaRPr lang="en-US" sz="1000" dirty="0"/>
           </a:p>
@@ -5085,14 +5427,14 @@
       </p:sp>
       <p:sp>
         <p:nvSpPr>
-          <p:cNvPr id="113" name="Text 106"/>
-          <p:cNvSpPr/>
-          <p:nvPr/>
-        </p:nvSpPr>
-        <p:spPr>
-          <a:xfrm>
-            <a:off x="2311400" y="2692400"/>
-            <a:ext cx="254000" cy="127000"/>
+          <p:cNvPr id="130" name="Text 110"/>
+          <p:cNvSpPr/>
+          <p:nvPr/>
+        </p:nvSpPr>
+        <p:spPr>
+          <a:xfrm>
+            <a:off x="2324100" y="2705100"/>
+            <a:ext cx="139700" cy="127000"/>
           </a:xfrm>
           <a:prstGeom prst="rect">
             <a:avLst/>
@@ -5116,7 +5458,7 @@
                 <a:ea typeface="Arial" pitchFamily="34" charset="-122"/>
                 <a:cs typeface="Arial" pitchFamily="34" charset="-120"/>
               </a:rPr>
-              <a:t>(5)</a:t>
+              <a:t>5</a:t>
             </a:r>
             <a:endParaRPr lang="en-US" sz="1000" dirty="0"/>
           </a:p>
@@ -5124,14 +5466,14 @@
       </p:sp>
       <p:sp>
         <p:nvSpPr>
-          <p:cNvPr id="114" name="Text 107"/>
-          <p:cNvSpPr/>
-          <p:nvPr/>
-        </p:nvSpPr>
-        <p:spPr>
-          <a:xfrm>
-            <a:off x="2590800" y="2692400"/>
-            <a:ext cx="254000" cy="127000"/>
+          <p:cNvPr id="131" name="Text 111"/>
+          <p:cNvSpPr/>
+          <p:nvPr/>
+        </p:nvSpPr>
+        <p:spPr>
+          <a:xfrm>
+            <a:off x="2616200" y="2705100"/>
+            <a:ext cx="139700" cy="127000"/>
           </a:xfrm>
           <a:prstGeom prst="rect">
             <a:avLst/>
@@ -5155,15 +5497,303 @@
                 <a:ea typeface="Arial" pitchFamily="34" charset="-122"/>
                 <a:cs typeface="Arial" pitchFamily="34" charset="-120"/>
               </a:rPr>
-              <a:t>(6)</a:t>
+              <a:t>6</a:t>
             </a:r>
             <a:endParaRPr lang="en-US" sz="1000" dirty="0"/>
           </a:p>
         </p:txBody>
       </p:sp>
-      <p:sp>
-        <p:nvSpPr>
-          <p:cNvPr id="115" name="Text 108"/>
+      <p:pic>
+        <p:nvPicPr>
+          <p:cNvPr id="132" name="Image 18" descr="/home/ahmed/Projects/ai_llm_slides/videos/machine-learning/03_ridger_regression_gradient_descent/recreated_pptx/build/assets/parens042/paren_tall_lp.png">    </p:cNvPr>
+          <p:cNvPicPr>
+            <a:picLocks noChangeAspect="1"/>
+          </p:cNvPicPr>
+          <p:nvPr/>
+        </p:nvPicPr>
+        <p:blipFill>
+          <a:blip r:embed="rId19"/>
+          <a:stretch>
+            <a:fillRect/>
+          </a:stretch>
+        </p:blipFill>
+        <p:spPr>
+          <a:xfrm>
+            <a:off x="1140826" y="2268266"/>
+            <a:ext cx="48664" cy="572225"/>
+          </a:xfrm>
+          <a:prstGeom prst="rect">
+            <a:avLst/>
+          </a:prstGeom>
+        </p:spPr>
+      </p:pic>
+      <p:pic>
+        <p:nvPicPr>
+          <p:cNvPr id="133" name="Image 19" descr="/home/ahmed/Projects/ai_llm_slides/videos/machine-learning/03_ridger_regression_gradient_descent/recreated_pptx/build/assets/parens042/paren_tall_rp.png">    </p:cNvPr>
+          <p:cNvPicPr>
+            <a:picLocks noChangeAspect="1"/>
+          </p:cNvPicPr>
+          <p:nvPr/>
+        </p:nvPicPr>
+        <p:blipFill>
+          <a:blip r:embed="rId20"/>
+          <a:stretch>
+            <a:fillRect/>
+          </a:stretch>
+        </p:blipFill>
+        <p:spPr>
+          <a:xfrm>
+            <a:off x="1352188" y="2268266"/>
+            <a:ext cx="48664" cy="572225"/>
+          </a:xfrm>
+          <a:prstGeom prst="rect">
+            <a:avLst/>
+          </a:prstGeom>
+        </p:spPr>
+      </p:pic>
+      <p:pic>
+        <p:nvPicPr>
+          <p:cNvPr id="134" name="Image 20" descr="/home/ahmed/Projects/ai_llm_slides/videos/machine-learning/03_ridger_regression_gradient_descent/recreated_pptx/build/assets/parens042/paren_tall_lp.png">    </p:cNvPr>
+          <p:cNvPicPr>
+            <a:picLocks noChangeAspect="1"/>
+          </p:cNvPicPr>
+          <p:nvPr/>
+        </p:nvPicPr>
+        <p:blipFill>
+          <a:blip r:embed="rId21"/>
+          <a:stretch>
+            <a:fillRect/>
+          </a:stretch>
+        </p:blipFill>
+        <p:spPr>
+          <a:xfrm>
+            <a:off x="1420226" y="2268266"/>
+            <a:ext cx="48664" cy="572225"/>
+          </a:xfrm>
+          <a:prstGeom prst="rect">
+            <a:avLst/>
+          </a:prstGeom>
+        </p:spPr>
+      </p:pic>
+      <p:pic>
+        <p:nvPicPr>
+          <p:cNvPr id="135" name="Image 21" descr="/home/ahmed/Projects/ai_llm_slides/videos/machine-learning/03_ridger_regression_gradient_descent/recreated_pptx/build/assets/parens042/paren_tall_rp.png">    </p:cNvPr>
+          <p:cNvPicPr>
+            <a:picLocks noChangeAspect="1"/>
+          </p:cNvPicPr>
+          <p:nvPr/>
+        </p:nvPicPr>
+        <p:blipFill>
+          <a:blip r:embed="rId22"/>
+          <a:stretch>
+            <a:fillRect/>
+          </a:stretch>
+        </p:blipFill>
+        <p:spPr>
+          <a:xfrm>
+            <a:off x="1618888" y="2268266"/>
+            <a:ext cx="48664" cy="572225"/>
+          </a:xfrm>
+          <a:prstGeom prst="rect">
+            <a:avLst/>
+          </a:prstGeom>
+        </p:spPr>
+      </p:pic>
+      <p:pic>
+        <p:nvPicPr>
+          <p:cNvPr id="136" name="Image 22" descr="/home/ahmed/Projects/ai_llm_slides/videos/machine-learning/03_ridger_regression_gradient_descent/recreated_pptx/build/assets/parens042/paren_tall_lp.png">    </p:cNvPr>
+          <p:cNvPicPr>
+            <a:picLocks noChangeAspect="1"/>
+          </p:cNvPicPr>
+          <p:nvPr/>
+        </p:nvPicPr>
+        <p:blipFill>
+          <a:blip r:embed="rId23"/>
+          <a:stretch>
+            <a:fillRect/>
+          </a:stretch>
+        </p:blipFill>
+        <p:spPr>
+          <a:xfrm>
+            <a:off x="1699626" y="2268266"/>
+            <a:ext cx="48664" cy="572225"/>
+          </a:xfrm>
+          <a:prstGeom prst="rect">
+            <a:avLst/>
+          </a:prstGeom>
+        </p:spPr>
+      </p:pic>
+      <p:pic>
+        <p:nvPicPr>
+          <p:cNvPr id="137" name="Image 23" descr="/home/ahmed/Projects/ai_llm_slides/videos/machine-learning/03_ridger_regression_gradient_descent/recreated_pptx/build/assets/parens042/paren_tall_rp.png">    </p:cNvPr>
+          <p:cNvPicPr>
+            <a:picLocks noChangeAspect="1"/>
+          </p:cNvPicPr>
+          <p:nvPr/>
+        </p:nvPicPr>
+        <p:blipFill>
+          <a:blip r:embed="rId24"/>
+          <a:stretch>
+            <a:fillRect/>
+          </a:stretch>
+        </p:blipFill>
+        <p:spPr>
+          <a:xfrm>
+            <a:off x="1898288" y="2268266"/>
+            <a:ext cx="48664" cy="572225"/>
+          </a:xfrm>
+          <a:prstGeom prst="rect">
+            <a:avLst/>
+          </a:prstGeom>
+        </p:spPr>
+      </p:pic>
+      <p:pic>
+        <p:nvPicPr>
+          <p:cNvPr id="138" name="Image 24" descr="/home/ahmed/Projects/ai_llm_slides/videos/machine-learning/03_ridger_regression_gradient_descent/recreated_pptx/build/assets/parens042/paren_tall_lp.png">    </p:cNvPr>
+          <p:cNvPicPr>
+            <a:picLocks noChangeAspect="1"/>
+          </p:cNvPicPr>
+          <p:nvPr/>
+        </p:nvPicPr>
+        <p:blipFill>
+          <a:blip r:embed="rId25"/>
+          <a:stretch>
+            <a:fillRect/>
+          </a:stretch>
+        </p:blipFill>
+        <p:spPr>
+          <a:xfrm>
+            <a:off x="1979026" y="2268266"/>
+            <a:ext cx="48664" cy="572225"/>
+          </a:xfrm>
+          <a:prstGeom prst="rect">
+            <a:avLst/>
+          </a:prstGeom>
+        </p:spPr>
+      </p:pic>
+      <p:pic>
+        <p:nvPicPr>
+          <p:cNvPr id="139" name="Image 25" descr="/home/ahmed/Projects/ai_llm_slides/videos/machine-learning/03_ridger_regression_gradient_descent/recreated_pptx/build/assets/parens042/paren_tall_rp.png">    </p:cNvPr>
+          <p:cNvPicPr>
+            <a:picLocks noChangeAspect="1"/>
+          </p:cNvPicPr>
+          <p:nvPr/>
+        </p:nvPicPr>
+        <p:blipFill>
+          <a:blip r:embed="rId26"/>
+          <a:stretch>
+            <a:fillRect/>
+          </a:stretch>
+        </p:blipFill>
+        <p:spPr>
+          <a:xfrm>
+            <a:off x="2190388" y="2268266"/>
+            <a:ext cx="48664" cy="572225"/>
+          </a:xfrm>
+          <a:prstGeom prst="rect">
+            <a:avLst/>
+          </a:prstGeom>
+        </p:spPr>
+      </p:pic>
+      <p:pic>
+        <p:nvPicPr>
+          <p:cNvPr id="140" name="Image 26" descr="/home/ahmed/Projects/ai_llm_slides/videos/machine-learning/03_ridger_regression_gradient_descent/recreated_pptx/build/assets/parens042/paren_tall_lp.png">    </p:cNvPr>
+          <p:cNvPicPr>
+            <a:picLocks noChangeAspect="1"/>
+          </p:cNvPicPr>
+          <p:nvPr/>
+        </p:nvPicPr>
+        <p:blipFill>
+          <a:blip r:embed="rId27"/>
+          <a:stretch>
+            <a:fillRect/>
+          </a:stretch>
+        </p:blipFill>
+        <p:spPr>
+          <a:xfrm>
+            <a:off x="2271126" y="2268266"/>
+            <a:ext cx="48664" cy="572225"/>
+          </a:xfrm>
+          <a:prstGeom prst="rect">
+            <a:avLst/>
+          </a:prstGeom>
+        </p:spPr>
+      </p:pic>
+      <p:pic>
+        <p:nvPicPr>
+          <p:cNvPr id="141" name="Image 27" descr="/home/ahmed/Projects/ai_llm_slides/videos/machine-learning/03_ridger_regression_gradient_descent/recreated_pptx/build/assets/parens042/paren_tall_rp.png">    </p:cNvPr>
+          <p:cNvPicPr>
+            <a:picLocks noChangeAspect="1"/>
+          </p:cNvPicPr>
+          <p:nvPr/>
+        </p:nvPicPr>
+        <p:blipFill>
+          <a:blip r:embed="rId28"/>
+          <a:stretch>
+            <a:fillRect/>
+          </a:stretch>
+        </p:blipFill>
+        <p:spPr>
+          <a:xfrm>
+            <a:off x="2482488" y="2268266"/>
+            <a:ext cx="48664" cy="572225"/>
+          </a:xfrm>
+          <a:prstGeom prst="rect">
+            <a:avLst/>
+          </a:prstGeom>
+        </p:spPr>
+      </p:pic>
+      <p:pic>
+        <p:nvPicPr>
+          <p:cNvPr id="142" name="Image 28" descr="/home/ahmed/Projects/ai_llm_slides/videos/machine-learning/03_ridger_regression_gradient_descent/recreated_pptx/build/assets/parens042/paren_tall_lp.png">    </p:cNvPr>
+          <p:cNvPicPr>
+            <a:picLocks noChangeAspect="1"/>
+          </p:cNvPicPr>
+          <p:nvPr/>
+        </p:nvPicPr>
+        <p:blipFill>
+          <a:blip r:embed="rId29"/>
+          <a:stretch>
+            <a:fillRect/>
+          </a:stretch>
+        </p:blipFill>
+        <p:spPr>
+          <a:xfrm>
+            <a:off x="2563226" y="2268266"/>
+            <a:ext cx="48664" cy="572225"/>
+          </a:xfrm>
+          <a:prstGeom prst="rect">
+            <a:avLst/>
+          </a:prstGeom>
+        </p:spPr>
+      </p:pic>
+      <p:pic>
+        <p:nvPicPr>
+          <p:cNvPr id="143" name="Image 29" descr="/home/ahmed/Projects/ai_llm_slides/videos/machine-learning/03_ridger_regression_gradient_descent/recreated_pptx/build/assets/parens042/paren_tall_rp.png">    </p:cNvPr>
+          <p:cNvPicPr>
+            <a:picLocks noChangeAspect="1"/>
+          </p:cNvPicPr>
+          <p:nvPr/>
+        </p:nvPicPr>
+        <p:blipFill>
+          <a:blip r:embed="rId30"/>
+          <a:stretch>
+            <a:fillRect/>
+          </a:stretch>
+        </p:blipFill>
+        <p:spPr>
+          <a:xfrm>
+            <a:off x="2761888" y="2268266"/>
+            <a:ext cx="48664" cy="572225"/>
+          </a:xfrm>
+          <a:prstGeom prst="rect">
+            <a:avLst/>
+          </a:prstGeom>
+        </p:spPr>
+      </p:pic>
+      <p:sp>
+        <p:nvSpPr>
+          <p:cNvPr id="144" name="Text 112"/>
           <p:cNvSpPr/>
           <p:nvPr/>
         </p:nvSpPr>
@@ -5216,7 +5846,7 @@
       </p:sp>
       <p:sp>
         <p:nvSpPr>
-          <p:cNvPr id="116" name="Text 109"/>
+          <p:cNvPr id="145" name="Text 113"/>
           <p:cNvSpPr/>
           <p:nvPr/>
         </p:nvSpPr>
@@ -5269,7 +5899,7 @@
       </p:sp>
       <p:sp>
         <p:nvSpPr>
-          <p:cNvPr id="117" name="Text 110"/>
+          <p:cNvPr id="146" name="Text 114"/>
           <p:cNvSpPr/>
           <p:nvPr/>
         </p:nvSpPr>
@@ -5322,7 +5952,7 @@
       </p:sp>
       <p:sp>
         <p:nvSpPr>
-          <p:cNvPr id="118" name="Text 111"/>
+          <p:cNvPr id="147" name="Text 115"/>
           <p:cNvSpPr/>
           <p:nvPr/>
         </p:nvSpPr>
@@ -5375,7 +6005,7 @@
       </p:sp>
       <p:sp>
         <p:nvSpPr>
-          <p:cNvPr id="119" name="Text 112"/>
+          <p:cNvPr id="148" name="Text 116"/>
           <p:cNvSpPr/>
           <p:nvPr/>
         </p:nvSpPr>
@@ -5428,7 +6058,7 @@
       </p:sp>
       <p:sp>
         <p:nvSpPr>
-          <p:cNvPr id="120" name="Text 113"/>
+          <p:cNvPr id="149" name="Text 117"/>
           <p:cNvSpPr/>
           <p:nvPr/>
         </p:nvSpPr>
